--- a/doc/dib7-presentation.pptx
+++ b/doc/dib7-presentation.pptx
@@ -117,6 +117,1266 @@
     </a:lvl9pPr>
   </p:defaultTextStyle>
 </p:presentation>
+</file>
+
+<file path=ppt/notesMasters/notesMaster1.xml><?xml version="1.0" encoding="utf-8"?>
+<p:notesMaster xmlns:a="http://schemas.openxmlformats.org/drawingml/2006/main" xmlns:p="http://schemas.openxmlformats.org/presentationml/2006/main" xmlns:r="http://schemas.openxmlformats.org/officeDocument/2006/relationships">
+  <p:cSld>
+    <p:bg>
+      <p:bgRef idx="1001">
+        <a:schemeClr val="bg1"/>
+      </p:bgRef>
+    </p:bg>
+    <p:spTree>
+      <p:nvGrpSpPr>
+        <p:cNvPr id="1" name=""/>
+        <p:cNvGrpSpPr/>
+        <p:nvPr/>
+      </p:nvGrpSpPr>
+      <p:grpSpPr>
+        <a:xfrm>
+          <a:off x="0" y="0"/>
+          <a:ext cx="0" cy="0"/>
+          <a:chOff x="0" y="0"/>
+          <a:chExt cx="0" cy="0"/>
+        </a:xfrm>
+      </p:grpSpPr>
+      <p:sp>
+        <p:nvSpPr>
+          <p:cNvPr id="2" name="Header Placeholder 1"/>
+          <p:cNvSpPr>
+            <a:spLocks noGrp="1"/>
+          </p:cNvSpPr>
+          <p:nvPr>
+            <p:ph type="hdr" sz="quarter"/>
+          </p:nvPr>
+        </p:nvSpPr>
+        <p:spPr>
+          <a:xfrm>
+            <a:off x="0" y="0"/>
+            <a:ext cx="2971800" cy="457200"/>
+          </a:xfrm>
+          <a:prstGeom prst="rect">
+            <a:avLst/>
+          </a:prstGeom>
+        </p:spPr>
+        <p:txBody>
+          <a:bodyPr vert="horz" lIns="91440" tIns="45720" rIns="91440" bIns="45720" rtlCol="0"/>
+          <a:lstStyle>
+            <a:lvl1pPr algn="l">
+              <a:defRPr sz="1200"/>
+            </a:lvl1pPr>
+          </a:lstStyle>
+          <a:p>
+            <a:endParaRPr lang="en-US"/>
+          </a:p>
+        </p:txBody>
+      </p:sp>
+      <p:sp>
+        <p:nvSpPr>
+          <p:cNvPr id="3" name="Date Placeholder 2"/>
+          <p:cNvSpPr>
+            <a:spLocks noGrp="1"/>
+          </p:cNvSpPr>
+          <p:nvPr>
+            <p:ph type="dt" idx="1"/>
+          </p:nvPr>
+        </p:nvSpPr>
+        <p:spPr>
+          <a:xfrm>
+            <a:off x="3884613" y="0"/>
+            <a:ext cx="2971800" cy="457200"/>
+          </a:xfrm>
+          <a:prstGeom prst="rect">
+            <a:avLst/>
+          </a:prstGeom>
+        </p:spPr>
+        <p:txBody>
+          <a:bodyPr vert="horz" lIns="91440" tIns="45720" rIns="91440" bIns="45720" rtlCol="0"/>
+          <a:lstStyle>
+            <a:lvl1pPr algn="r">
+              <a:defRPr sz="1200"/>
+            </a:lvl1pPr>
+          </a:lstStyle>
+          <a:p>
+            <a:fld id="{0F89C1C7-3DCD-1040-A9CF-14679D8B5DDD}" type="datetimeFigureOut">
+              <a:rPr lang="en-US" smtClean="0"/>
+              <a:t>10/17/16</a:t>
+            </a:fld>
+            <a:endParaRPr lang="en-US"/>
+          </a:p>
+        </p:txBody>
+      </p:sp>
+      <p:sp>
+        <p:nvSpPr>
+          <p:cNvPr id="4" name="Slide Image Placeholder 3"/>
+          <p:cNvSpPr>
+            <a:spLocks noGrp="1" noRot="1" noChangeAspect="1"/>
+          </p:cNvSpPr>
+          <p:nvPr>
+            <p:ph type="sldImg" idx="2"/>
+          </p:nvPr>
+        </p:nvSpPr>
+        <p:spPr>
+          <a:xfrm>
+            <a:off x="1143000" y="685800"/>
+            <a:ext cx="4572000" cy="3429000"/>
+          </a:xfrm>
+          <a:prstGeom prst="rect">
+            <a:avLst/>
+          </a:prstGeom>
+          <a:noFill/>
+          <a:ln w="12700">
+            <a:solidFill>
+              <a:prstClr val="black"/>
+            </a:solidFill>
+          </a:ln>
+        </p:spPr>
+        <p:txBody>
+          <a:bodyPr vert="horz" lIns="91440" tIns="45720" rIns="91440" bIns="45720" rtlCol="0" anchor="ctr"/>
+          <a:lstStyle/>
+          <a:p>
+            <a:endParaRPr lang="en-US"/>
+          </a:p>
+        </p:txBody>
+      </p:sp>
+      <p:sp>
+        <p:nvSpPr>
+          <p:cNvPr id="5" name="Notes Placeholder 4"/>
+          <p:cNvSpPr>
+            <a:spLocks noGrp="1"/>
+          </p:cNvSpPr>
+          <p:nvPr>
+            <p:ph type="body" sz="quarter" idx="3"/>
+          </p:nvPr>
+        </p:nvSpPr>
+        <p:spPr>
+          <a:xfrm>
+            <a:off x="685800" y="4343400"/>
+            <a:ext cx="5486400" cy="4114800"/>
+          </a:xfrm>
+          <a:prstGeom prst="rect">
+            <a:avLst/>
+          </a:prstGeom>
+        </p:spPr>
+        <p:txBody>
+          <a:bodyPr vert="horz" lIns="91440" tIns="45720" rIns="91440" bIns="45720" rtlCol="0"/>
+          <a:lstStyle/>
+          <a:p>
+            <a:pPr lvl="0"/>
+            <a:r>
+              <a:rPr lang="en-US" smtClean="0"/>
+              <a:t>Click to edit Master text styles</a:t>
+            </a:r>
+          </a:p>
+          <a:p>
+            <a:pPr lvl="1"/>
+            <a:r>
+              <a:rPr lang="en-US" smtClean="0"/>
+              <a:t>Second level</a:t>
+            </a:r>
+          </a:p>
+          <a:p>
+            <a:pPr lvl="2"/>
+            <a:r>
+              <a:rPr lang="en-US" smtClean="0"/>
+              <a:t>Third level</a:t>
+            </a:r>
+          </a:p>
+          <a:p>
+            <a:pPr lvl="3"/>
+            <a:r>
+              <a:rPr lang="en-US" smtClean="0"/>
+              <a:t>Fourth level</a:t>
+            </a:r>
+          </a:p>
+          <a:p>
+            <a:pPr lvl="4"/>
+            <a:r>
+              <a:rPr lang="en-US" smtClean="0"/>
+              <a:t>Fifth level</a:t>
+            </a:r>
+            <a:endParaRPr lang="en-US"/>
+          </a:p>
+        </p:txBody>
+      </p:sp>
+      <p:sp>
+        <p:nvSpPr>
+          <p:cNvPr id="6" name="Footer Placeholder 5"/>
+          <p:cNvSpPr>
+            <a:spLocks noGrp="1"/>
+          </p:cNvSpPr>
+          <p:nvPr>
+            <p:ph type="ftr" sz="quarter" idx="4"/>
+          </p:nvPr>
+        </p:nvSpPr>
+        <p:spPr>
+          <a:xfrm>
+            <a:off x="0" y="8685213"/>
+            <a:ext cx="2971800" cy="457200"/>
+          </a:xfrm>
+          <a:prstGeom prst="rect">
+            <a:avLst/>
+          </a:prstGeom>
+        </p:spPr>
+        <p:txBody>
+          <a:bodyPr vert="horz" lIns="91440" tIns="45720" rIns="91440" bIns="45720" rtlCol="0" anchor="b"/>
+          <a:lstStyle>
+            <a:lvl1pPr algn="l">
+              <a:defRPr sz="1200"/>
+            </a:lvl1pPr>
+          </a:lstStyle>
+          <a:p>
+            <a:endParaRPr lang="en-US"/>
+          </a:p>
+        </p:txBody>
+      </p:sp>
+      <p:sp>
+        <p:nvSpPr>
+          <p:cNvPr id="7" name="Slide Number Placeholder 6"/>
+          <p:cNvSpPr>
+            <a:spLocks noGrp="1"/>
+          </p:cNvSpPr>
+          <p:nvPr>
+            <p:ph type="sldNum" sz="quarter" idx="5"/>
+          </p:nvPr>
+        </p:nvSpPr>
+        <p:spPr>
+          <a:xfrm>
+            <a:off x="3884613" y="8685213"/>
+            <a:ext cx="2971800" cy="457200"/>
+          </a:xfrm>
+          <a:prstGeom prst="rect">
+            <a:avLst/>
+          </a:prstGeom>
+        </p:spPr>
+        <p:txBody>
+          <a:bodyPr vert="horz" lIns="91440" tIns="45720" rIns="91440" bIns="45720" rtlCol="0" anchor="b"/>
+          <a:lstStyle>
+            <a:lvl1pPr algn="r">
+              <a:defRPr sz="1200"/>
+            </a:lvl1pPr>
+          </a:lstStyle>
+          <a:p>
+            <a:fld id="{BB5E49A5-4136-284D-997B-48E1D791AD67}" type="slidenum">
+              <a:rPr lang="en-US" smtClean="0"/>
+              <a:t>‹#›</a:t>
+            </a:fld>
+            <a:endParaRPr lang="en-US"/>
+          </a:p>
+        </p:txBody>
+      </p:sp>
+    </p:spTree>
+    <p:extLst>
+      <p:ext uri="{BB962C8B-B14F-4D97-AF65-F5344CB8AC3E}">
+        <p14:creationId xmlns:p14="http://schemas.microsoft.com/office/powerpoint/2010/main" val="2623252185"/>
+      </p:ext>
+    </p:extLst>
+  </p:cSld>
+  <p:clrMap bg1="lt1" tx1="dk1" bg2="lt2" tx2="dk2" accent1="accent1" accent2="accent2" accent3="accent3" accent4="accent4" accent5="accent5" accent6="accent6" hlink="hlink" folHlink="folHlink"/>
+  <p:notesStyle>
+    <a:lvl1pPr marL="0" algn="l" defTabSz="457200" rtl="0" eaLnBrk="1" latinLnBrk="0" hangingPunct="1">
+      <a:defRPr sz="1200" kern="1200">
+        <a:solidFill>
+          <a:schemeClr val="tx1"/>
+        </a:solidFill>
+        <a:latin typeface="+mn-lt"/>
+        <a:ea typeface="+mn-ea"/>
+        <a:cs typeface="+mn-cs"/>
+      </a:defRPr>
+    </a:lvl1pPr>
+    <a:lvl2pPr marL="457200" algn="l" defTabSz="457200" rtl="0" eaLnBrk="1" latinLnBrk="0" hangingPunct="1">
+      <a:defRPr sz="1200" kern="1200">
+        <a:solidFill>
+          <a:schemeClr val="tx1"/>
+        </a:solidFill>
+        <a:latin typeface="+mn-lt"/>
+        <a:ea typeface="+mn-ea"/>
+        <a:cs typeface="+mn-cs"/>
+      </a:defRPr>
+    </a:lvl2pPr>
+    <a:lvl3pPr marL="914400" algn="l" defTabSz="457200" rtl="0" eaLnBrk="1" latinLnBrk="0" hangingPunct="1">
+      <a:defRPr sz="1200" kern="1200">
+        <a:solidFill>
+          <a:schemeClr val="tx1"/>
+        </a:solidFill>
+        <a:latin typeface="+mn-lt"/>
+        <a:ea typeface="+mn-ea"/>
+        <a:cs typeface="+mn-cs"/>
+      </a:defRPr>
+    </a:lvl3pPr>
+    <a:lvl4pPr marL="1371600" algn="l" defTabSz="457200" rtl="0" eaLnBrk="1" latinLnBrk="0" hangingPunct="1">
+      <a:defRPr sz="1200" kern="1200">
+        <a:solidFill>
+          <a:schemeClr val="tx1"/>
+        </a:solidFill>
+        <a:latin typeface="+mn-lt"/>
+        <a:ea typeface="+mn-ea"/>
+        <a:cs typeface="+mn-cs"/>
+      </a:defRPr>
+    </a:lvl4pPr>
+    <a:lvl5pPr marL="1828800" algn="l" defTabSz="457200" rtl="0" eaLnBrk="1" latinLnBrk="0" hangingPunct="1">
+      <a:defRPr sz="1200" kern="1200">
+        <a:solidFill>
+          <a:schemeClr val="tx1"/>
+        </a:solidFill>
+        <a:latin typeface="+mn-lt"/>
+        <a:ea typeface="+mn-ea"/>
+        <a:cs typeface="+mn-cs"/>
+      </a:defRPr>
+    </a:lvl5pPr>
+    <a:lvl6pPr marL="2286000" algn="l" defTabSz="457200" rtl="0" eaLnBrk="1" latinLnBrk="0" hangingPunct="1">
+      <a:defRPr sz="1200" kern="1200">
+        <a:solidFill>
+          <a:schemeClr val="tx1"/>
+        </a:solidFill>
+        <a:latin typeface="+mn-lt"/>
+        <a:ea typeface="+mn-ea"/>
+        <a:cs typeface="+mn-cs"/>
+      </a:defRPr>
+    </a:lvl6pPr>
+    <a:lvl7pPr marL="2743200" algn="l" defTabSz="457200" rtl="0" eaLnBrk="1" latinLnBrk="0" hangingPunct="1">
+      <a:defRPr sz="1200" kern="1200">
+        <a:solidFill>
+          <a:schemeClr val="tx1"/>
+        </a:solidFill>
+        <a:latin typeface="+mn-lt"/>
+        <a:ea typeface="+mn-ea"/>
+        <a:cs typeface="+mn-cs"/>
+      </a:defRPr>
+    </a:lvl7pPr>
+    <a:lvl8pPr marL="3200400" algn="l" defTabSz="457200" rtl="0" eaLnBrk="1" latinLnBrk="0" hangingPunct="1">
+      <a:defRPr sz="1200" kern="1200">
+        <a:solidFill>
+          <a:schemeClr val="tx1"/>
+        </a:solidFill>
+        <a:latin typeface="+mn-lt"/>
+        <a:ea typeface="+mn-ea"/>
+        <a:cs typeface="+mn-cs"/>
+      </a:defRPr>
+    </a:lvl8pPr>
+    <a:lvl9pPr marL="3657600" algn="l" defTabSz="457200" rtl="0" eaLnBrk="1" latinLnBrk="0" hangingPunct="1">
+      <a:defRPr sz="1200" kern="1200">
+        <a:solidFill>
+          <a:schemeClr val="tx1"/>
+        </a:solidFill>
+        <a:latin typeface="+mn-lt"/>
+        <a:ea typeface="+mn-ea"/>
+        <a:cs typeface="+mn-cs"/>
+      </a:defRPr>
+    </a:lvl9pPr>
+  </p:notesStyle>
+</p:notesMaster>
+</file>
+
+<file path=ppt/notesSlides/notesSlide1.xml><?xml version="1.0" encoding="utf-8"?>
+<p:notes xmlns:a="http://schemas.openxmlformats.org/drawingml/2006/main" xmlns:p="http://schemas.openxmlformats.org/presentationml/2006/main" xmlns:r="http://schemas.openxmlformats.org/officeDocument/2006/relationships">
+  <p:cSld>
+    <p:spTree>
+      <p:nvGrpSpPr>
+        <p:cNvPr id="1" name=""/>
+        <p:cNvGrpSpPr/>
+        <p:nvPr/>
+      </p:nvGrpSpPr>
+      <p:grpSpPr>
+        <a:xfrm>
+          <a:off x="0" y="0"/>
+          <a:ext cx="0" cy="0"/>
+          <a:chOff x="0" y="0"/>
+          <a:chExt cx="0" cy="0"/>
+        </a:xfrm>
+      </p:grpSpPr>
+      <p:sp>
+        <p:nvSpPr>
+          <p:cNvPr id="2" name="Slide Image Placeholder 1"/>
+          <p:cNvSpPr>
+            <a:spLocks noGrp="1"/>
+          </p:cNvSpPr>
+          <p:nvPr>
+            <p:ph type="sldImg" idx="2"/>
+          </p:nvPr>
+        </p:nvSpPr>
+        <p:spPr/>
+      </p:sp>
+      <p:sp>
+        <p:nvSpPr>
+          <p:cNvPr id="3" name="Notes Placeholder 2"/>
+          <p:cNvSpPr>
+            <a:spLocks noGrp="1"/>
+          </p:cNvSpPr>
+          <p:nvPr>
+            <p:ph type="body" idx="3" sz="quarter"/>
+          </p:nvPr>
+        </p:nvSpPr>
+        <p:spPr/>
+        <p:txBody>
+          <a:bodyPr/>
+          <a:lstStyle/>
+          <a:p>
+            <a:r>
+              <a:t>This presentation follows dib7 from Linux image builds to repeatable instance deployment with dib7-deploy. The first half builds and publishes images; the second uses Terraform to select a cataloged image and launch it in AWS, Google Cloud, OpenStack, or vSphere.</a:t>
+            </a:r>
+          </a:p>
+        </p:txBody>
+      </p:sp>
+      <p:sp>
+        <p:nvSpPr>
+          <p:cNvPr id="4" name="Slide Number Placeholder 3"/>
+          <p:cNvSpPr>
+            <a:spLocks noGrp="1"/>
+          </p:cNvSpPr>
+          <p:nvPr>
+            <p:ph type="sldNum" idx="5" sz="quarter"/>
+          </p:nvPr>
+        </p:nvSpPr>
+        <p:spPr/>
+      </p:sp>
+    </p:spTree>
+  </p:cSld>
+  <p:clrMapOvr>
+    <a:masterClrMapping/>
+  </p:clrMapOvr>
+</p:notes>
+</file>
+
+<file path=ppt/notesSlides/notesSlide10.xml><?xml version="1.0" encoding="utf-8"?>
+<p:notes xmlns:a="http://schemas.openxmlformats.org/drawingml/2006/main" xmlns:p="http://schemas.openxmlformats.org/presentationml/2006/main" xmlns:r="http://schemas.openxmlformats.org/officeDocument/2006/relationships">
+  <p:cSld>
+    <p:spTree>
+      <p:nvGrpSpPr>
+        <p:cNvPr id="1" name=""/>
+        <p:cNvGrpSpPr/>
+        <p:nvPr/>
+      </p:nvGrpSpPr>
+      <p:grpSpPr>
+        <a:xfrm>
+          <a:off x="0" y="0"/>
+          <a:ext cx="0" cy="0"/>
+          <a:chOff x="0" y="0"/>
+          <a:chExt cx="0" cy="0"/>
+        </a:xfrm>
+      </p:grpSpPr>
+      <p:sp>
+        <p:nvSpPr>
+          <p:cNvPr id="2" name="Slide Image Placeholder 1"/>
+          <p:cNvSpPr>
+            <a:spLocks noGrp="1"/>
+          </p:cNvSpPr>
+          <p:nvPr>
+            <p:ph type="sldImg" idx="2"/>
+          </p:nvPr>
+        </p:nvSpPr>
+        <p:spPr/>
+      </p:sp>
+      <p:sp>
+        <p:nvSpPr>
+          <p:cNvPr id="3" name="Notes Placeholder 2"/>
+          <p:cNvSpPr>
+            <a:spLocks noGrp="1"/>
+          </p:cNvSpPr>
+          <p:nvPr>
+            <p:ph type="body" idx="3" sz="quarter"/>
+          </p:nvPr>
+        </p:nvSpPr>
+        <p:spPr/>
+        <p:txBody>
+          <a:bodyPr/>
+          <a:lstStyle/>
+          <a:p>
+            <a:r>
+              <a:t>Each provider root consumes the same catalog fields: image name, artifact ID, version, boot mode, and scope. The Terraform resource is provider-specific: an AMI for EC2, a Compute image for GCP, a Glance image for Nova, or a vSphere template to clone. Catalog identity remains consistent across all four.</a:t>
+            </a:r>
+          </a:p>
+        </p:txBody>
+      </p:sp>
+      <p:sp>
+        <p:nvSpPr>
+          <p:cNvPr id="4" name="Slide Number Placeholder 3"/>
+          <p:cNvSpPr>
+            <a:spLocks noGrp="1"/>
+          </p:cNvSpPr>
+          <p:nvPr>
+            <p:ph type="sldNum" idx="5" sz="quarter"/>
+          </p:nvPr>
+        </p:nvSpPr>
+        <p:spPr/>
+      </p:sp>
+    </p:spTree>
+  </p:cSld>
+  <p:clrMapOvr>
+    <a:masterClrMapping/>
+  </p:clrMapOvr>
+</p:notes>
+</file>
+
+<file path=ppt/notesSlides/notesSlide11.xml><?xml version="1.0" encoding="utf-8"?>
+<p:notes xmlns:a="http://schemas.openxmlformats.org/drawingml/2006/main" xmlns:p="http://schemas.openxmlformats.org/presentationml/2006/main" xmlns:r="http://schemas.openxmlformats.org/officeDocument/2006/relationships">
+  <p:cSld>
+    <p:spTree>
+      <p:nvGrpSpPr>
+        <p:cNvPr id="1" name=""/>
+        <p:cNvGrpSpPr/>
+        <p:nvPr/>
+      </p:nvGrpSpPr>
+      <p:grpSpPr>
+        <a:xfrm>
+          <a:off x="0" y="0"/>
+          <a:ext cx="0" cy="0"/>
+          <a:chOff x="0" y="0"/>
+          <a:chExt cx="0" cy="0"/>
+        </a:xfrm>
+      </p:grpSpPr>
+      <p:sp>
+        <p:nvSpPr>
+          <p:cNvPr id="2" name="Slide Image Placeholder 1"/>
+          <p:cNvSpPr>
+            <a:spLocks noGrp="1"/>
+          </p:cNvSpPr>
+          <p:nvPr>
+            <p:ph type="sldImg" idx="2"/>
+          </p:nvPr>
+        </p:nvSpPr>
+        <p:spPr/>
+      </p:sp>
+      <p:sp>
+        <p:nvSpPr>
+          <p:cNvPr id="3" name="Notes Placeholder 2"/>
+          <p:cNvSpPr>
+            <a:spLocks noGrp="1"/>
+          </p:cNvSpPr>
+          <p:nvPr>
+            <p:ph type="body" idx="3" sz="quarter"/>
+          </p:nvPr>
+        </p:nvSpPr>
+        <p:spPr/>
+        <p:txBody>
+          <a:bodyPr/>
+          <a:lstStyle/>
+          <a:p>
+            <a:r>
+              <a:t>Operators browse the catalog, generate provider tfvars, and run init, plan, or apply through the provider wrappers. Those wrappers retrieve the right credentials from Vault. Workspaces separate deployments, and the state backup tool writes backups outside the repository.</a:t>
+            </a:r>
+          </a:p>
+        </p:txBody>
+      </p:sp>
+      <p:sp>
+        <p:nvSpPr>
+          <p:cNvPr id="4" name="Slide Number Placeholder 3"/>
+          <p:cNvSpPr>
+            <a:spLocks noGrp="1"/>
+          </p:cNvSpPr>
+          <p:nvPr>
+            <p:ph type="sldNum" idx="5" sz="quarter"/>
+          </p:nvPr>
+        </p:nvSpPr>
+        <p:spPr/>
+      </p:sp>
+    </p:spTree>
+  </p:cSld>
+  <p:clrMapOvr>
+    <a:masterClrMapping/>
+  </p:clrMapOvr>
+</p:notes>
+</file>
+
+<file path=ppt/notesSlides/notesSlide12.xml><?xml version="1.0" encoding="utf-8"?>
+<p:notes xmlns:a="http://schemas.openxmlformats.org/drawingml/2006/main" xmlns:p="http://schemas.openxmlformats.org/presentationml/2006/main" xmlns:r="http://schemas.openxmlformats.org/officeDocument/2006/relationships">
+  <p:cSld>
+    <p:spTree>
+      <p:nvGrpSpPr>
+        <p:cNvPr id="1" name=""/>
+        <p:cNvGrpSpPr/>
+        <p:nvPr/>
+      </p:nvGrpSpPr>
+      <p:grpSpPr>
+        <a:xfrm>
+          <a:off x="0" y="0"/>
+          <a:ext cx="0" cy="0"/>
+          <a:chOff x="0" y="0"/>
+          <a:chExt cx="0" cy="0"/>
+        </a:xfrm>
+      </p:grpSpPr>
+      <p:sp>
+        <p:nvSpPr>
+          <p:cNvPr id="2" name="Slide Image Placeholder 1"/>
+          <p:cNvSpPr>
+            <a:spLocks noGrp="1"/>
+          </p:cNvSpPr>
+          <p:nvPr>
+            <p:ph type="sldImg" idx="2"/>
+          </p:nvPr>
+        </p:nvSpPr>
+        <p:spPr/>
+      </p:sp>
+      <p:sp>
+        <p:nvSpPr>
+          <p:cNvPr id="3" name="Notes Placeholder 2"/>
+          <p:cNvSpPr>
+            <a:spLocks noGrp="1"/>
+          </p:cNvSpPr>
+          <p:nvPr>
+            <p:ph type="body" idx="3" sz="quarter"/>
+          </p:nvPr>
+        </p:nvSpPr>
+        <p:spPr/>
+        <p:txBody>
+          <a:bodyPr/>
+          <a:lstStyle/>
+          <a:p>
+            <a:r>
+              <a:t>Deployment stays reviewable when image selection, launch settings, credentials, and state have clear boundaries. Confirm provider, project, region, or vCenter scope in the catalog. Keep network and compute settings in launch tfvars. Review plan changes before apply, use a workspace per deployment, and back up state securely.</a:t>
+            </a:r>
+          </a:p>
+        </p:txBody>
+      </p:sp>
+      <p:sp>
+        <p:nvSpPr>
+          <p:cNvPr id="4" name="Slide Number Placeholder 3"/>
+          <p:cNvSpPr>
+            <a:spLocks noGrp="1"/>
+          </p:cNvSpPr>
+          <p:nvPr>
+            <p:ph type="sldNum" idx="5" sz="quarter"/>
+          </p:nvPr>
+        </p:nvSpPr>
+        <p:spPr/>
+      </p:sp>
+    </p:spTree>
+  </p:cSld>
+  <p:clrMapOvr>
+    <a:masterClrMapping/>
+  </p:clrMapOvr>
+</p:notes>
+</file>
+
+<file path=ppt/notesSlides/notesSlide13.xml><?xml version="1.0" encoding="utf-8"?>
+<p:notes xmlns:a="http://schemas.openxmlformats.org/drawingml/2006/main" xmlns:p="http://schemas.openxmlformats.org/presentationml/2006/main" xmlns:r="http://schemas.openxmlformats.org/officeDocument/2006/relationships">
+  <p:cSld>
+    <p:spTree>
+      <p:nvGrpSpPr>
+        <p:cNvPr id="1" name=""/>
+        <p:cNvGrpSpPr/>
+        <p:nvPr/>
+      </p:nvGrpSpPr>
+      <p:grpSpPr>
+        <a:xfrm>
+          <a:off x="0" y="0"/>
+          <a:ext cx="0" cy="0"/>
+          <a:chOff x="0" y="0"/>
+          <a:chExt cx="0" cy="0"/>
+        </a:xfrm>
+      </p:grpSpPr>
+      <p:sp>
+        <p:nvSpPr>
+          <p:cNvPr id="2" name="Slide Image Placeholder 1"/>
+          <p:cNvSpPr>
+            <a:spLocks noGrp="1"/>
+          </p:cNvSpPr>
+          <p:nvPr>
+            <p:ph type="sldImg" idx="2"/>
+          </p:nvPr>
+        </p:nvSpPr>
+        <p:spPr/>
+      </p:sp>
+      <p:sp>
+        <p:nvSpPr>
+          <p:cNvPr id="3" name="Notes Placeholder 2"/>
+          <p:cNvSpPr>
+            <a:spLocks noGrp="1"/>
+          </p:cNvSpPr>
+          <p:nvPr>
+            <p:ph type="body" idx="3" sz="quarter"/>
+          </p:nvPr>
+        </p:nvSpPr>
+        <p:spPr/>
+        <p:txBody>
+          <a:bodyPr/>
+          <a:lstStyle/>
+          <a:p>
+            <a:r>
+              <a:t>Together, dib7 and dib7-deploy build a seven-release Linux image portfolio, publish cataloged artifacts to four providers, and launch selected images with Terraform. The catalog links the build to the deployment, while plans, scoped credentials, and managed state make each launch reviewable and repeatable.</a:t>
+            </a:r>
+          </a:p>
+        </p:txBody>
+      </p:sp>
+      <p:sp>
+        <p:nvSpPr>
+          <p:cNvPr id="4" name="Slide Number Placeholder 3"/>
+          <p:cNvSpPr>
+            <a:spLocks noGrp="1"/>
+          </p:cNvSpPr>
+          <p:nvPr>
+            <p:ph type="sldNum" idx="5" sz="quarter"/>
+          </p:nvPr>
+        </p:nvSpPr>
+        <p:spPr/>
+      </p:sp>
+    </p:spTree>
+  </p:cSld>
+  <p:clrMapOvr>
+    <a:masterClrMapping/>
+  </p:clrMapOvr>
+</p:notes>
+</file>
+
+<file path=ppt/notesSlides/notesSlide2.xml><?xml version="1.0" encoding="utf-8"?>
+<p:notes xmlns:a="http://schemas.openxmlformats.org/drawingml/2006/main" xmlns:p="http://schemas.openxmlformats.org/presentationml/2006/main" xmlns:r="http://schemas.openxmlformats.org/officeDocument/2006/relationships">
+  <p:cSld>
+    <p:spTree>
+      <p:nvGrpSpPr>
+        <p:cNvPr id="1" name=""/>
+        <p:cNvGrpSpPr/>
+        <p:nvPr/>
+      </p:nvGrpSpPr>
+      <p:grpSpPr>
+        <a:xfrm>
+          <a:off x="0" y="0"/>
+          <a:ext cx="0" cy="0"/>
+          <a:chOff x="0" y="0"/>
+          <a:chExt cx="0" cy="0"/>
+        </a:xfrm>
+      </p:grpSpPr>
+      <p:sp>
+        <p:nvSpPr>
+          <p:cNvPr id="2" name="Slide Image Placeholder 1"/>
+          <p:cNvSpPr>
+            <a:spLocks noGrp="1"/>
+          </p:cNvSpPr>
+          <p:nvPr>
+            <p:ph type="sldImg" idx="2"/>
+          </p:nvPr>
+        </p:nvSpPr>
+        <p:spPr/>
+      </p:sp>
+      <p:sp>
+        <p:nvSpPr>
+          <p:cNvPr id="3" name="Notes Placeholder 2"/>
+          <p:cNvSpPr>
+            <a:spLocks noGrp="1"/>
+          </p:cNvSpPr>
+          <p:nvPr>
+            <p:ph type="body" idx="3" sz="quarter"/>
+          </p:nvPr>
+        </p:nvSpPr>
+        <p:spPr/>
+        <p:txBody>
+          <a:bodyPr/>
+          <a:lstStyle/>
+          <a:p>
+            <a:r>
+              <a:t>The system has two cooperating halves. dib7 builds a known Linux image and publishes its provider artifact IDs to a shared catalog. dib7-deploy reads the catalog, combines the selected image with local launch settings, and uses a Terraform root for AWS, Google Cloud, OpenStack, or vSphere.</a:t>
+            </a:r>
+          </a:p>
+        </p:txBody>
+      </p:sp>
+      <p:sp>
+        <p:nvSpPr>
+          <p:cNvPr id="4" name="Slide Number Placeholder 3"/>
+          <p:cNvSpPr>
+            <a:spLocks noGrp="1"/>
+          </p:cNvSpPr>
+          <p:nvPr>
+            <p:ph type="sldNum" idx="5" sz="quarter"/>
+          </p:nvPr>
+        </p:nvSpPr>
+        <p:spPr/>
+      </p:sp>
+    </p:spTree>
+  </p:cSld>
+  <p:clrMapOvr>
+    <a:masterClrMapping/>
+  </p:clrMapOvr>
+</p:notes>
+</file>
+
+<file path=ppt/notesSlides/notesSlide3.xml><?xml version="1.0" encoding="utf-8"?>
+<p:notes xmlns:a="http://schemas.openxmlformats.org/drawingml/2006/main" xmlns:p="http://schemas.openxmlformats.org/presentationml/2006/main" xmlns:r="http://schemas.openxmlformats.org/officeDocument/2006/relationships">
+  <p:cSld>
+    <p:spTree>
+      <p:nvGrpSpPr>
+        <p:cNvPr id="1" name=""/>
+        <p:cNvGrpSpPr/>
+        <p:nvPr/>
+      </p:nvGrpSpPr>
+      <p:grpSpPr>
+        <a:xfrm>
+          <a:off x="0" y="0"/>
+          <a:ext cx="0" cy="0"/>
+          <a:chOff x="0" y="0"/>
+          <a:chExt cx="0" cy="0"/>
+        </a:xfrm>
+      </p:grpSpPr>
+      <p:sp>
+        <p:nvSpPr>
+          <p:cNvPr id="2" name="Slide Image Placeholder 1"/>
+          <p:cNvSpPr>
+            <a:spLocks noGrp="1"/>
+          </p:cNvSpPr>
+          <p:nvPr>
+            <p:ph type="sldImg" idx="2"/>
+          </p:nvPr>
+        </p:nvSpPr>
+        <p:spPr/>
+      </p:sp>
+      <p:sp>
+        <p:nvSpPr>
+          <p:cNvPr id="3" name="Notes Placeholder 2"/>
+          <p:cNvSpPr>
+            <a:spLocks noGrp="1"/>
+          </p:cNvSpPr>
+          <p:nvPr>
+            <p:ph type="body" idx="3" sz="quarter"/>
+          </p:nvPr>
+        </p:nvSpPr>
+        <p:spPr/>
+        <p:txBody>
+          <a:bodyPr/>
+          <a:lstStyle/>
+          <a:p>
+            <a:r>
+              <a:t>The image pipeline builds QCOW2 once. Google Cloud and OpenStack consume that image path directly; AWS and vSphere use the OVA conversion path. dib7 records each published artifact in the catalog, and Terraform selects the matching provider image for deployment.</a:t>
+            </a:r>
+          </a:p>
+        </p:txBody>
+      </p:sp>
+      <p:sp>
+        <p:nvSpPr>
+          <p:cNvPr id="4" name="Slide Number Placeholder 3"/>
+          <p:cNvSpPr>
+            <a:spLocks noGrp="1"/>
+          </p:cNvSpPr>
+          <p:nvPr>
+            <p:ph type="sldNum" idx="5" sz="quarter"/>
+          </p:nvPr>
+        </p:nvSpPr>
+        <p:spPr/>
+      </p:sp>
+    </p:spTree>
+  </p:cSld>
+  <p:clrMapOvr>
+    <a:masterClrMapping/>
+  </p:clrMapOvr>
+</p:notes>
+</file>
+
+<file path=ppt/notesSlides/notesSlide4.xml><?xml version="1.0" encoding="utf-8"?>
+<p:notes xmlns:a="http://schemas.openxmlformats.org/drawingml/2006/main" xmlns:p="http://schemas.openxmlformats.org/presentationml/2006/main" xmlns:r="http://schemas.openxmlformats.org/officeDocument/2006/relationships">
+  <p:cSld>
+    <p:spTree>
+      <p:nvGrpSpPr>
+        <p:cNvPr id="1" name=""/>
+        <p:cNvGrpSpPr/>
+        <p:nvPr/>
+      </p:nvGrpSpPr>
+      <p:grpSpPr>
+        <a:xfrm>
+          <a:off x="0" y="0"/>
+          <a:ext cx="0" cy="0"/>
+          <a:chOff x="0" y="0"/>
+          <a:chExt cx="0" cy="0"/>
+        </a:xfrm>
+      </p:grpSpPr>
+      <p:sp>
+        <p:nvSpPr>
+          <p:cNvPr id="2" name="Slide Image Placeholder 1"/>
+          <p:cNvSpPr>
+            <a:spLocks noGrp="1"/>
+          </p:cNvSpPr>
+          <p:nvPr>
+            <p:ph type="sldImg" idx="2"/>
+          </p:nvPr>
+        </p:nvSpPr>
+        <p:spPr/>
+      </p:sp>
+      <p:sp>
+        <p:nvSpPr>
+          <p:cNvPr id="3" name="Notes Placeholder 2"/>
+          <p:cNvSpPr>
+            <a:spLocks noGrp="1"/>
+          </p:cNvSpPr>
+          <p:nvPr>
+            <p:ph type="body" idx="3" sz="quarter"/>
+          </p:nvPr>
+        </p:nvSpPr>
+        <p:spPr/>
+        <p:txBody>
+          <a:bodyPr/>
+          <a:lstStyle/>
+          <a:p>
+            <a:r>
+              <a:t>The catalog supplies the logical image, provider artifact ID, version, and scope. A separate launch settings file holds choices such as instance name, network, machine size, and storage. Select the matching Terraform provider root, review its plan, then apply the deployment.</a:t>
+            </a:r>
+          </a:p>
+        </p:txBody>
+      </p:sp>
+      <p:sp>
+        <p:nvSpPr>
+          <p:cNvPr id="4" name="Slide Number Placeholder 3"/>
+          <p:cNvSpPr>
+            <a:spLocks noGrp="1"/>
+          </p:cNvSpPr>
+          <p:nvPr>
+            <p:ph type="sldNum" idx="5" sz="quarter"/>
+          </p:nvPr>
+        </p:nvSpPr>
+        <p:spPr/>
+      </p:sp>
+    </p:spTree>
+  </p:cSld>
+  <p:clrMapOvr>
+    <a:masterClrMapping/>
+  </p:clrMapOvr>
+</p:notes>
+</file>
+
+<file path=ppt/notesSlides/notesSlide5.xml><?xml version="1.0" encoding="utf-8"?>
+<p:notes xmlns:a="http://schemas.openxmlformats.org/drawingml/2006/main" xmlns:p="http://schemas.openxmlformats.org/presentationml/2006/main" xmlns:r="http://schemas.openxmlformats.org/officeDocument/2006/relationships">
+  <p:cSld>
+    <p:spTree>
+      <p:nvGrpSpPr>
+        <p:cNvPr id="1" name=""/>
+        <p:cNvGrpSpPr/>
+        <p:nvPr/>
+      </p:nvGrpSpPr>
+      <p:grpSpPr>
+        <a:xfrm>
+          <a:off x="0" y="0"/>
+          <a:ext cx="0" cy="0"/>
+          <a:chOff x="0" y="0"/>
+          <a:chExt cx="0" cy="0"/>
+        </a:xfrm>
+      </p:grpSpPr>
+      <p:sp>
+        <p:nvSpPr>
+          <p:cNvPr id="2" name="Slide Image Placeholder 1"/>
+          <p:cNvSpPr>
+            <a:spLocks noGrp="1"/>
+          </p:cNvSpPr>
+          <p:nvPr>
+            <p:ph type="sldImg" idx="2"/>
+          </p:nvPr>
+        </p:nvSpPr>
+        <p:spPr/>
+      </p:sp>
+      <p:sp>
+        <p:nvSpPr>
+          <p:cNvPr id="3" name="Notes Placeholder 2"/>
+          <p:cNvSpPr>
+            <a:spLocks noGrp="1"/>
+          </p:cNvSpPr>
+          <p:nvPr>
+            <p:ph type="body" idx="3" sz="quarter"/>
+          </p:nvPr>
+        </p:nvSpPr>
+        <p:spPr/>
+        <p:txBody>
+          <a:bodyPr/>
+          <a:lstStyle/>
+          <a:p>
+            <a:r>
+              <a:t>Every artifact carries a compact identity through the pipeline. The build stage associates the QCOW2 image with the current run. Conversion verifies that identity and carries it into the OVA when one is needed. Publication confirms that it is consuming the artifact produced by the intended run. These small stamp files create an inspectable chain from source build to published image. Operators can answer a useful question quickly: which run produced this artifact, and which stages have completed for it?</a:t>
+            </a:r>
+          </a:p>
+        </p:txBody>
+      </p:sp>
+      <p:sp>
+        <p:nvSpPr>
+          <p:cNvPr id="4" name="Slide Number Placeholder 3"/>
+          <p:cNvSpPr>
+            <a:spLocks noGrp="1"/>
+          </p:cNvSpPr>
+          <p:nvPr>
+            <p:ph type="sldNum" idx="5" sz="quarter"/>
+          </p:nvPr>
+        </p:nvSpPr>
+        <p:spPr/>
+      </p:sp>
+    </p:spTree>
+  </p:cSld>
+  <p:clrMapOvr>
+    <a:masterClrMapping/>
+  </p:clrMapOvr>
+</p:notes>
+</file>
+
+<file path=ppt/notesSlides/notesSlide6.xml><?xml version="1.0" encoding="utf-8"?>
+<p:notes xmlns:a="http://schemas.openxmlformats.org/drawingml/2006/main" xmlns:p="http://schemas.openxmlformats.org/presentationml/2006/main" xmlns:r="http://schemas.openxmlformats.org/officeDocument/2006/relationships">
+  <p:cSld>
+    <p:spTree>
+      <p:nvGrpSpPr>
+        <p:cNvPr id="1" name=""/>
+        <p:cNvGrpSpPr/>
+        <p:nvPr/>
+      </p:nvGrpSpPr>
+      <p:grpSpPr>
+        <a:xfrm>
+          <a:off x="0" y="0"/>
+          <a:ext cx="0" cy="0"/>
+          <a:chOff x="0" y="0"/>
+          <a:chExt cx="0" cy="0"/>
+        </a:xfrm>
+      </p:grpSpPr>
+      <p:sp>
+        <p:nvSpPr>
+          <p:cNvPr id="2" name="Slide Image Placeholder 1"/>
+          <p:cNvSpPr>
+            <a:spLocks noGrp="1"/>
+          </p:cNvSpPr>
+          <p:nvPr>
+            <p:ph type="sldImg" idx="2"/>
+          </p:nvPr>
+        </p:nvSpPr>
+        <p:spPr/>
+      </p:sp>
+      <p:sp>
+        <p:nvSpPr>
+          <p:cNvPr id="3" name="Notes Placeholder 2"/>
+          <p:cNvSpPr>
+            <a:spLocks noGrp="1"/>
+          </p:cNvSpPr>
+          <p:nvPr>
+            <p:ph type="body" idx="3" sz="quarter"/>
+          </p:nvPr>
+        </p:nvSpPr>
+        <p:spPr/>
+        <p:txBody>
+          <a:bodyPr/>
+          <a:lstStyle/>
+          <a:p>
+            <a:r>
+              <a:t>One coordinated run can process seven configured operating system releases while preserving an individual result for each one. CentOS Stream, Debian, Fedora, Rocky, and Ubuntu share the same orchestration and still retain their family and release differences in data. The run attempts the complete portfolio, captures each outcome, and produces one clear stage summary. Environment checks happen once at the appropriate boundary. This gives the operator both breadth and precision: a single workflow for the estate, with enough detail to act on any individual image.</a:t>
+            </a:r>
+          </a:p>
+        </p:txBody>
+      </p:sp>
+      <p:sp>
+        <p:nvSpPr>
+          <p:cNvPr id="4" name="Slide Number Placeholder 3"/>
+          <p:cNvSpPr>
+            <a:spLocks noGrp="1"/>
+          </p:cNvSpPr>
+          <p:nvPr>
+            <p:ph type="sldNum" idx="5" sz="quarter"/>
+          </p:nvPr>
+        </p:nvSpPr>
+        <p:spPr/>
+      </p:sp>
+    </p:spTree>
+  </p:cSld>
+  <p:clrMapOvr>
+    <a:masterClrMapping/>
+  </p:clrMapOvr>
+</p:notes>
+</file>
+
+<file path=ppt/notesSlides/notesSlide7.xml><?xml version="1.0" encoding="utf-8"?>
+<p:notes xmlns:a="http://schemas.openxmlformats.org/drawingml/2006/main" xmlns:p="http://schemas.openxmlformats.org/presentationml/2006/main" xmlns:r="http://schemas.openxmlformats.org/officeDocument/2006/relationships">
+  <p:cSld>
+    <p:spTree>
+      <p:nvGrpSpPr>
+        <p:cNvPr id="1" name=""/>
+        <p:cNvGrpSpPr/>
+        <p:nvPr/>
+      </p:nvGrpSpPr>
+      <p:grpSpPr>
+        <a:xfrm>
+          <a:off x="0" y="0"/>
+          <a:ext cx="0" cy="0"/>
+          <a:chOff x="0" y="0"/>
+          <a:chExt cx="0" cy="0"/>
+        </a:xfrm>
+      </p:grpSpPr>
+      <p:sp>
+        <p:nvSpPr>
+          <p:cNvPr id="2" name="Slide Image Placeholder 1"/>
+          <p:cNvSpPr>
+            <a:spLocks noGrp="1"/>
+          </p:cNvSpPr>
+          <p:nvPr>
+            <p:ph type="sldImg" idx="2"/>
+          </p:nvPr>
+        </p:nvSpPr>
+        <p:spPr/>
+      </p:sp>
+      <p:sp>
+        <p:nvSpPr>
+          <p:cNvPr id="3" name="Notes Placeholder 2"/>
+          <p:cNvSpPr>
+            <a:spLocks noGrp="1"/>
+          </p:cNvSpPr>
+          <p:nvPr>
+            <p:ph type="body" idx="3" sz="quarter"/>
+          </p:nvPr>
+        </p:nvSpPr>
+        <p:spPr/>
+        <p:txBody>
+          <a:bodyPr/>
+          <a:lstStyle/>
+          <a:p>
+            <a:r>
+              <a:t>Operational experience feeds back into the platform. A real multi-image run exposed how serial batching and persistent build directories interacted. The response was architectural: observe the behavior, identify the mechanism, improve the orchestration, and carry the lesson into the next run. That work added per-image results, consolidated reporting, and artifact identity. The incident matters because it became capability. The pipeline now communicates more clearly, completes more useful work, and gives operators stronger evidence about every published artifact.</a:t>
+            </a:r>
+          </a:p>
+        </p:txBody>
+      </p:sp>
+      <p:sp>
+        <p:nvSpPr>
+          <p:cNvPr id="4" name="Slide Number Placeholder 3"/>
+          <p:cNvSpPr>
+            <a:spLocks noGrp="1"/>
+          </p:cNvSpPr>
+          <p:nvPr>
+            <p:ph type="sldNum" idx="5" sz="quarter"/>
+          </p:nvPr>
+        </p:nvSpPr>
+        <p:spPr/>
+      </p:sp>
+    </p:spTree>
+  </p:cSld>
+  <p:clrMapOvr>
+    <a:masterClrMapping/>
+  </p:clrMapOvr>
+</p:notes>
+</file>
+
+<file path=ppt/notesSlides/notesSlide8.xml><?xml version="1.0" encoding="utf-8"?>
+<p:notes xmlns:a="http://schemas.openxmlformats.org/drawingml/2006/main" xmlns:p="http://schemas.openxmlformats.org/presentationml/2006/main" xmlns:r="http://schemas.openxmlformats.org/officeDocument/2006/relationships">
+  <p:cSld>
+    <p:spTree>
+      <p:nvGrpSpPr>
+        <p:cNvPr id="1" name=""/>
+        <p:cNvGrpSpPr/>
+        <p:nvPr/>
+      </p:nvGrpSpPr>
+      <p:grpSpPr>
+        <a:xfrm>
+          <a:off x="0" y="0"/>
+          <a:ext cx="0" cy="0"/>
+          <a:chOff x="0" y="0"/>
+          <a:chExt cx="0" cy="0"/>
+        </a:xfrm>
+      </p:grpSpPr>
+      <p:sp>
+        <p:nvSpPr>
+          <p:cNvPr id="2" name="Slide Image Placeholder 1"/>
+          <p:cNvSpPr>
+            <a:spLocks noGrp="1"/>
+          </p:cNvSpPr>
+          <p:nvPr>
+            <p:ph type="sldImg" idx="2"/>
+          </p:nvPr>
+        </p:nvSpPr>
+        <p:spPr/>
+      </p:sp>
+      <p:sp>
+        <p:nvSpPr>
+          <p:cNvPr id="3" name="Notes Placeholder 2"/>
+          <p:cNvSpPr>
+            <a:spLocks noGrp="1"/>
+          </p:cNvSpPr>
+          <p:nvPr>
+            <p:ph type="body" idx="3" sz="quarter"/>
+          </p:nvPr>
+        </p:nvSpPr>
+        <p:spPr/>
+        <p:txBody>
+          <a:bodyPr/>
+          <a:lstStyle/>
+          <a:p>
+            <a:r>
+              <a:t>dib7-deploy keeps image identity separate from launch settings. Catalog-generated variables record the selected image and version; local tfvars hold destination network and compute choices. Provider runners retrieve credentials from HashiCorp Vault at runtime. Terraform state tracks the resources and should be backed up outside the repository.</a:t>
+            </a:r>
+          </a:p>
+        </p:txBody>
+      </p:sp>
+      <p:sp>
+        <p:nvSpPr>
+          <p:cNvPr id="4" name="Slide Number Placeholder 3"/>
+          <p:cNvSpPr>
+            <a:spLocks noGrp="1"/>
+          </p:cNvSpPr>
+          <p:nvPr>
+            <p:ph type="sldNum" idx="5" sz="quarter"/>
+          </p:nvPr>
+        </p:nvSpPr>
+        <p:spPr/>
+      </p:sp>
+    </p:spTree>
+  </p:cSld>
+  <p:clrMapOvr>
+    <a:masterClrMapping/>
+  </p:clrMapOvr>
+</p:notes>
+</file>
+
+<file path=ppt/notesSlides/notesSlide9.xml><?xml version="1.0" encoding="utf-8"?>
+<p:notes xmlns:a="http://schemas.openxmlformats.org/drawingml/2006/main" xmlns:p="http://schemas.openxmlformats.org/presentationml/2006/main" xmlns:r="http://schemas.openxmlformats.org/officeDocument/2006/relationships">
+  <p:cSld>
+    <p:spTree>
+      <p:nvGrpSpPr>
+        <p:cNvPr id="1" name=""/>
+        <p:cNvGrpSpPr/>
+        <p:nvPr/>
+      </p:nvGrpSpPr>
+      <p:grpSpPr>
+        <a:xfrm>
+          <a:off x="0" y="0"/>
+          <a:ext cx="0" cy="0"/>
+          <a:chOff x="0" y="0"/>
+          <a:chExt cx="0" cy="0"/>
+        </a:xfrm>
+      </p:grpSpPr>
+      <p:sp>
+        <p:nvSpPr>
+          <p:cNvPr id="2" name="Slide Image Placeholder 1"/>
+          <p:cNvSpPr>
+            <a:spLocks noGrp="1"/>
+          </p:cNvSpPr>
+          <p:nvPr>
+            <p:ph type="sldImg" idx="2"/>
+          </p:nvPr>
+        </p:nvSpPr>
+        <p:spPr/>
+      </p:sp>
+      <p:sp>
+        <p:nvSpPr>
+          <p:cNvPr id="3" name="Notes Placeholder 2"/>
+          <p:cNvSpPr>
+            <a:spLocks noGrp="1"/>
+          </p:cNvSpPr>
+          <p:nvPr>
+            <p:ph type="body" idx="3" sz="quarter"/>
+          </p:nvPr>
+        </p:nvSpPr>
+        <p:spPr/>
+        <p:txBody>
+          <a:bodyPr/>
+          <a:lstStyle/>
+          <a:p>
+            <a:r>
+              <a:t>Choose an image and provider scope from the dib7 catalog, generate the provider tfvars, and add launch settings. Terraform plan previews the changes; apply creates the instance. Each provider root has its own state and workspace, so separate deployments stay manageable.</a:t>
+            </a:r>
+          </a:p>
+        </p:txBody>
+      </p:sp>
+      <p:sp>
+        <p:nvSpPr>
+          <p:cNvPr id="4" name="Slide Number Placeholder 3"/>
+          <p:cNvSpPr>
+            <a:spLocks noGrp="1"/>
+          </p:cNvSpPr>
+          <p:nvPr>
+            <p:ph type="sldNum" idx="5" sz="quarter"/>
+          </p:nvPr>
+        </p:nvSpPr>
+        <p:spPr/>
+      </p:sp>
+    </p:spTree>
+  </p:cSld>
+  <p:clrMapOvr>
+    <a:masterClrMapping/>
+  </p:clrMapOvr>
+</p:notes>
 </file>
 
 <file path=ppt/slideLayouts/slideLayout1.xml><?xml version="1.0" encoding="utf-8"?>
@@ -3348,7 +4608,7 @@
               </a:defRPr>
             </a:pPr>
             <a:r>
-              <a:t>diskimage-builder and Ansible, from seven Linux releases to four platforms.</a:t>
+              <a:t>diskimage-builder and Terraform, from seven Linux releases to four providers.</a:t>
             </a:r>
           </a:p>
         </p:txBody>
@@ -3827,7 +5087,7 @@
               </a:defRPr>
             </a:pPr>
             <a:r>
-              <a:t>cloud / vSphere</a:t>
+              <a:t>four providers</a:t>
             </a:r>
           </a:p>
         </p:txBody>
@@ -3915,7 +5175,7 @@
               </a:defRPr>
             </a:pPr>
             <a:r>
-              <a:t>OPERATE</a:t>
+              <a:t>DEPLOY</a:t>
             </a:r>
           </a:p>
         </p:txBody>
@@ -3960,7 +5220,7 @@
               </a:defRPr>
             </a:pPr>
             <a:r>
-              <a:t>roles + lifecycle</a:t>
+              <a:t>Terraform roots</a:t>
             </a:r>
           </a:p>
         </p:txBody>
@@ -4076,7 +5336,7 @@
               </a:defRPr>
             </a:pPr>
             <a:r>
-              <a:t>PORTABLE CUSTOMIZATION</a:t>
+              <a:t>PROVIDER MAPPING</a:t>
             </a:r>
           </a:p>
         </p:txBody>
@@ -4121,7 +5381,7 @@
               </a:defRPr>
             </a:pPr>
             <a:r>
-              <a:t>Storage by intent, not device name</a:t>
+              <a:t>One catalog contract. Four Terraform roots.</a:t>
             </a:r>
           </a:p>
         </p:txBody>
@@ -4252,7 +5512,7 @@
               </a:defRPr>
             </a:pPr>
             <a:r>
-              <a:t>DECLARATION</a:t>
+              <a:t>CATALOG FIELDS</a:t>
             </a:r>
           </a:p>
         </p:txBody>
@@ -4308,8 +5568,8 @@
         </p:nvSpPr>
         <p:spPr>
           <a:xfrm>
-            <a:off x="768096" y="1993392"/>
-            <a:ext cx="4114800" cy="182880"/>
+            <a:off x="868680" y="2048256"/>
+            <a:ext cx="3337560" cy="256032"/>
           </a:xfrm>
           <a:prstGeom prst="rect">
             <a:avLst/>
@@ -4332,7 +5592,7 @@
               <a:spcAft>
                 <a:spcPts val="0"/>
               </a:spcAft>
-              <a:defRPr sz="750" b="1">
+              <a:defRPr sz="1200" b="1">
                 <a:solidFill>
                   <a:srgbClr val="8CC9C9"/>
                 </a:solidFill>
@@ -4340,7 +5600,7 @@
               </a:defRPr>
             </a:pPr>
             <a:r>
-              <a:t>diskb:</a:t>
+              <a:t>image_logical_name</a:t>
             </a:r>
           </a:p>
         </p:txBody>
@@ -4353,8 +5613,8 @@
         </p:nvSpPr>
         <p:spPr>
           <a:xfrm>
-            <a:off x="768096" y="2112264"/>
-            <a:ext cx="4114800" cy="182880"/>
+            <a:off x="868680" y="2377440"/>
+            <a:ext cx="3337560" cy="256032"/>
           </a:xfrm>
           <a:prstGeom prst="rect">
             <a:avLst/>
@@ -4377,7 +5637,7 @@
               <a:spcAft>
                 <a:spcPts val="0"/>
               </a:spcAft>
-              <a:defRPr sz="750" b="0">
+              <a:defRPr sz="1200" b="0">
                 <a:solidFill>
                   <a:srgbClr val="FFFFFF"/>
                 </a:solidFill>
@@ -4385,7 +5645,7 @@
               </a:defRPr>
             </a:pPr>
             <a:r>
-              <a:t>  controller_number: 1</a:t>
+              <a:t>image_artifact_id</a:t>
             </a:r>
           </a:p>
         </p:txBody>
@@ -4398,8 +5658,8 @@
         </p:nvSpPr>
         <p:spPr>
           <a:xfrm>
-            <a:off x="768096" y="2231136"/>
-            <a:ext cx="4114800" cy="182880"/>
+            <a:off x="868680" y="2706624"/>
+            <a:ext cx="3337560" cy="256032"/>
           </a:xfrm>
           <a:prstGeom prst="rect">
             <a:avLst/>
@@ -4422,7 +5682,7 @@
               <a:spcAft>
                 <a:spcPts val="0"/>
               </a:spcAft>
-              <a:defRPr sz="750" b="0">
+              <a:defRPr sz="1200" b="0">
                 <a:solidFill>
                   <a:srgbClr val="FFFFFF"/>
                 </a:solidFill>
@@ -4430,7 +5690,7 @@
               </a:defRPr>
             </a:pPr>
             <a:r>
-              <a:t>  unit_number:       0</a:t>
+              <a:t>image_version</a:t>
             </a:r>
           </a:p>
         </p:txBody>
@@ -4443,8 +5703,8 @@
         </p:nvSpPr>
         <p:spPr>
           <a:xfrm>
-            <a:off x="768096" y="2350008"/>
-            <a:ext cx="4114800" cy="182880"/>
+            <a:off x="868680" y="3035808"/>
+            <a:ext cx="3337560" cy="256032"/>
           </a:xfrm>
           <a:prstGeom prst="rect">
             <a:avLst/>
@@ -4467,7 +5727,7 @@
               <a:spcAft>
                 <a:spcPts val="0"/>
               </a:spcAft>
-              <a:defRPr sz="750" b="0">
+              <a:defRPr sz="1200" b="0">
                 <a:solidFill>
                   <a:srgbClr val="FFFFFF"/>
                 </a:solidFill>
@@ -4475,7 +5735,7 @@
               </a:defRPr>
             </a:pPr>
             <a:r>
-              <a:t>  part_number:       1</a:t>
+              <a:t>image_boot_mode</a:t>
             </a:r>
           </a:p>
         </p:txBody>
@@ -4488,8 +5748,8 @@
         </p:nvSpPr>
         <p:spPr>
           <a:xfrm>
-            <a:off x="768096" y="2468880"/>
-            <a:ext cx="4114800" cy="182880"/>
+            <a:off x="868680" y="3364992"/>
+            <a:ext cx="3337560" cy="256032"/>
           </a:xfrm>
           <a:prstGeom prst="rect">
             <a:avLst/>
@@ -4512,7 +5772,7 @@
               <a:spcAft>
                 <a:spcPts val="0"/>
               </a:spcAft>
-              <a:defRPr sz="750" b="0">
+              <a:defRPr sz="1200" b="0">
                 <a:solidFill>
                   <a:srgbClr val="FFFFFF"/>
                 </a:solidFill>
@@ -4520,7 +5780,7 @@
               </a:defRPr>
             </a:pPr>
             <a:r>
-              <a:t>  size_gb:           "{{ vm_disk1_gb | default(40, true) }}"</a:t>
+              <a:t>image_scope</a:t>
             </a:r>
           </a:p>
         </p:txBody>
@@ -4533,8 +5793,8 @@
         </p:nvSpPr>
         <p:spPr>
           <a:xfrm>
-            <a:off x="768096" y="2587752"/>
-            <a:ext cx="4114800" cy="182880"/>
+            <a:off x="868680" y="3703320"/>
+            <a:ext cx="3337560" cy="219456"/>
           </a:xfrm>
           <a:prstGeom prst="rect">
             <a:avLst/>
@@ -4557,424 +5817,22 @@
               <a:spcAft>
                 <a:spcPts val="0"/>
               </a:spcAft>
-              <a:defRPr sz="750" b="0">
-                <a:solidFill>
-                  <a:srgbClr val="FFFFFF"/>
-                </a:solidFill>
-                <a:latin typeface="DejaVu Sans Mono"/>
-              </a:defRPr>
-            </a:pPr>
-            <a:r>
-              <a:t>  vg:                'vg2'</a:t>
-            </a:r>
-          </a:p>
-        </p:txBody>
-      </p:sp>
-      <p:sp>
-        <p:nvSpPr>
-          <p:cNvPr id="15" name="TextBox 14"/>
-          <p:cNvSpPr txBox="1"/>
-          <p:nvPr/>
-        </p:nvSpPr>
-        <p:spPr>
-          <a:xfrm>
-            <a:off x="768096" y="2706624"/>
-            <a:ext cx="4114800" cy="182880"/>
-          </a:xfrm>
-          <a:prstGeom prst="rect">
-            <a:avLst/>
-          </a:prstGeom>
-          <a:noFill/>
-        </p:spPr>
-        <p:txBody>
-          <a:bodyPr wrap="square" lIns="18288" rIns="18288" tIns="18288" bIns="18288" anchor="t">
-            <a:spAutoFit/>
-          </a:bodyPr>
-          <a:lstStyle/>
-          <a:p>
-            <a:pPr algn="l">
-              <a:lnSpc>
-                <a:spcPct val="105000"/>
-              </a:lnSpc>
-              <a:spcBef>
-                <a:spcPts val="0"/>
-              </a:spcBef>
-              <a:spcAft>
-                <a:spcPts val="0"/>
-              </a:spcAft>
-              <a:defRPr sz="750" b="0">
-                <a:solidFill>
-                  <a:srgbClr val="FFFFFF"/>
-                </a:solidFill>
-                <a:latin typeface="DejaVu Sans Mono"/>
-              </a:defRPr>
-            </a:pPr>
-          </a:p>
-        </p:txBody>
-      </p:sp>
-      <p:sp>
-        <p:nvSpPr>
-          <p:cNvPr id="16" name="TextBox 15"/>
-          <p:cNvSpPr txBox="1"/>
-          <p:nvPr/>
-        </p:nvSpPr>
-        <p:spPr>
-          <a:xfrm>
-            <a:off x="768096" y="2825496"/>
-            <a:ext cx="4114800" cy="182880"/>
-          </a:xfrm>
-          <a:prstGeom prst="rect">
-            <a:avLst/>
-          </a:prstGeom>
-          <a:noFill/>
-        </p:spPr>
-        <p:txBody>
-          <a:bodyPr wrap="square" lIns="18288" rIns="18288" tIns="18288" bIns="18288" anchor="t">
-            <a:spAutoFit/>
-          </a:bodyPr>
-          <a:lstStyle/>
-          <a:p>
-            <a:pPr algn="l">
-              <a:lnSpc>
-                <a:spcPct val="105000"/>
-              </a:lnSpc>
-              <a:spcBef>
-                <a:spcPts val="0"/>
-              </a:spcBef>
-              <a:spcAft>
-                <a:spcPts val="0"/>
-              </a:spcAft>
-              <a:defRPr sz="750" b="1">
-                <a:solidFill>
-                  <a:srgbClr val="8CC9C9"/>
-                </a:solidFill>
-                <a:latin typeface="DejaVu Sans Mono"/>
-              </a:defRPr>
-            </a:pPr>
-            <a:r>
-              <a:t>volumes:</a:t>
-            </a:r>
-          </a:p>
-        </p:txBody>
-      </p:sp>
-      <p:sp>
-        <p:nvSpPr>
-          <p:cNvPr id="17" name="TextBox 16"/>
-          <p:cNvSpPr txBox="1"/>
-          <p:nvPr/>
-        </p:nvSpPr>
-        <p:spPr>
-          <a:xfrm>
-            <a:off x="768096" y="2944368"/>
-            <a:ext cx="4114800" cy="182880"/>
-          </a:xfrm>
-          <a:prstGeom prst="rect">
-            <a:avLst/>
-          </a:prstGeom>
-          <a:noFill/>
-        </p:spPr>
-        <p:txBody>
-          <a:bodyPr wrap="square" lIns="18288" rIns="18288" tIns="18288" bIns="18288" anchor="t">
-            <a:spAutoFit/>
-          </a:bodyPr>
-          <a:lstStyle/>
-          <a:p>
-            <a:pPr algn="l">
-              <a:lnSpc>
-                <a:spcPct val="105000"/>
-              </a:lnSpc>
-              <a:spcBef>
-                <a:spcPts val="0"/>
-              </a:spcBef>
-              <a:spcAft>
-                <a:spcPts val="0"/>
-              </a:spcAft>
-              <a:defRPr sz="750" b="0">
-                <a:solidFill>
-                  <a:srgbClr val="FFFFFF"/>
-                </a:solidFill>
-                <a:latin typeface="DejaVu Sans Mono"/>
-              </a:defRPr>
-            </a:pPr>
-            <a:r>
-              <a:t>  - path:     '/var/log'</a:t>
-            </a:r>
-          </a:p>
-        </p:txBody>
-      </p:sp>
-      <p:sp>
-        <p:nvSpPr>
-          <p:cNvPr id="18" name="TextBox 17"/>
-          <p:cNvSpPr txBox="1"/>
-          <p:nvPr/>
-        </p:nvSpPr>
-        <p:spPr>
-          <a:xfrm>
-            <a:off x="768096" y="3063240"/>
-            <a:ext cx="4114800" cy="182880"/>
-          </a:xfrm>
-          <a:prstGeom prst="rect">
-            <a:avLst/>
-          </a:prstGeom>
-          <a:noFill/>
-        </p:spPr>
-        <p:txBody>
-          <a:bodyPr wrap="square" lIns="18288" rIns="18288" tIns="18288" bIns="18288" anchor="t">
-            <a:spAutoFit/>
-          </a:bodyPr>
-          <a:lstStyle/>
-          <a:p>
-            <a:pPr algn="l">
-              <a:lnSpc>
-                <a:spcPct val="105000"/>
-              </a:lnSpc>
-              <a:spcBef>
-                <a:spcPts val="0"/>
-              </a:spcBef>
-              <a:spcAft>
-                <a:spcPts val="0"/>
-              </a:spcAft>
-              <a:defRPr sz="750" b="0">
-                <a:solidFill>
-                  <a:srgbClr val="FFFFFF"/>
-                </a:solidFill>
-                <a:latin typeface="DejaVu Sans Mono"/>
-              </a:defRPr>
-            </a:pPr>
-            <a:r>
-              <a:t>    vg:       "{{ diskb.vg }}"</a:t>
-            </a:r>
-          </a:p>
-        </p:txBody>
-      </p:sp>
-      <p:sp>
-        <p:nvSpPr>
-          <p:cNvPr id="19" name="TextBox 18"/>
-          <p:cNvSpPr txBox="1"/>
-          <p:nvPr/>
-        </p:nvSpPr>
-        <p:spPr>
-          <a:xfrm>
-            <a:off x="768096" y="3182112"/>
-            <a:ext cx="4114800" cy="182880"/>
-          </a:xfrm>
-          <a:prstGeom prst="rect">
-            <a:avLst/>
-          </a:prstGeom>
-          <a:noFill/>
-        </p:spPr>
-        <p:txBody>
-          <a:bodyPr wrap="square" lIns="18288" rIns="18288" tIns="18288" bIns="18288" anchor="t">
-            <a:spAutoFit/>
-          </a:bodyPr>
-          <a:lstStyle/>
-          <a:p>
-            <a:pPr algn="l">
-              <a:lnSpc>
-                <a:spcPct val="105000"/>
-              </a:lnSpc>
-              <a:spcBef>
-                <a:spcPts val="0"/>
-              </a:spcBef>
-              <a:spcAft>
-                <a:spcPts val="0"/>
-              </a:spcAft>
-              <a:defRPr sz="750" b="0">
-                <a:solidFill>
-                  <a:srgbClr val="FFFFFF"/>
-                </a:solidFill>
-                <a:latin typeface="DejaVu Sans Mono"/>
-              </a:defRPr>
-            </a:pPr>
-            <a:r>
-              <a:t>    lv:       'lv_var_log'</a:t>
-            </a:r>
-          </a:p>
-        </p:txBody>
-      </p:sp>
-      <p:sp>
-        <p:nvSpPr>
-          <p:cNvPr id="20" name="TextBox 19"/>
-          <p:cNvSpPr txBox="1"/>
-          <p:nvPr/>
-        </p:nvSpPr>
-        <p:spPr>
-          <a:xfrm>
-            <a:off x="768096" y="3300984"/>
-            <a:ext cx="4114800" cy="182880"/>
-          </a:xfrm>
-          <a:prstGeom prst="rect">
-            <a:avLst/>
-          </a:prstGeom>
-          <a:noFill/>
-        </p:spPr>
-        <p:txBody>
-          <a:bodyPr wrap="square" lIns="18288" rIns="18288" tIns="18288" bIns="18288" anchor="t">
-            <a:spAutoFit/>
-          </a:bodyPr>
-          <a:lstStyle/>
-          <a:p>
-            <a:pPr algn="l">
-              <a:lnSpc>
-                <a:spcPct val="105000"/>
-              </a:lnSpc>
-              <a:spcBef>
-                <a:spcPts val="0"/>
-              </a:spcBef>
-              <a:spcAft>
-                <a:spcPts val="0"/>
-              </a:spcAft>
-              <a:defRPr sz="750" b="0">
-                <a:solidFill>
-                  <a:srgbClr val="FFFFFF"/>
-                </a:solidFill>
-                <a:latin typeface="DejaVu Sans Mono"/>
-              </a:defRPr>
-            </a:pPr>
-            <a:r>
-              <a:t>    fstype:   'ext4'</a:t>
-            </a:r>
-          </a:p>
-        </p:txBody>
-      </p:sp>
-      <p:sp>
-        <p:nvSpPr>
-          <p:cNvPr id="21" name="TextBox 20"/>
-          <p:cNvSpPr txBox="1"/>
-          <p:nvPr/>
-        </p:nvSpPr>
-        <p:spPr>
-          <a:xfrm>
-            <a:off x="768096" y="3419856"/>
-            <a:ext cx="4114800" cy="182880"/>
-          </a:xfrm>
-          <a:prstGeom prst="rect">
-            <a:avLst/>
-          </a:prstGeom>
-          <a:noFill/>
-        </p:spPr>
-        <p:txBody>
-          <a:bodyPr wrap="square" lIns="18288" rIns="18288" tIns="18288" bIns="18288" anchor="t">
-            <a:spAutoFit/>
-          </a:bodyPr>
-          <a:lstStyle/>
-          <a:p>
-            <a:pPr algn="l">
-              <a:lnSpc>
-                <a:spcPct val="105000"/>
-              </a:lnSpc>
-              <a:spcBef>
-                <a:spcPts val="0"/>
-              </a:spcBef>
-              <a:spcAft>
-                <a:spcPts val="0"/>
-              </a:spcAft>
-              <a:defRPr sz="750" b="0">
-                <a:solidFill>
-                  <a:srgbClr val="FFFFFF"/>
-                </a:solidFill>
-                <a:latin typeface="DejaVu Sans Mono"/>
-              </a:defRPr>
-            </a:pPr>
-            <a:r>
-              <a:t>    size:     '4G'</a:t>
-            </a:r>
-          </a:p>
-        </p:txBody>
-      </p:sp>
-      <p:sp>
-        <p:nvSpPr>
-          <p:cNvPr id="22" name="TextBox 21"/>
-          <p:cNvSpPr txBox="1"/>
-          <p:nvPr/>
-        </p:nvSpPr>
-        <p:spPr>
-          <a:xfrm>
-            <a:off x="768096" y="3538728"/>
-            <a:ext cx="4114800" cy="182880"/>
-          </a:xfrm>
-          <a:prstGeom prst="rect">
-            <a:avLst/>
-          </a:prstGeom>
-          <a:noFill/>
-        </p:spPr>
-        <p:txBody>
-          <a:bodyPr wrap="square" lIns="18288" rIns="18288" tIns="18288" bIns="18288" anchor="t">
-            <a:spAutoFit/>
-          </a:bodyPr>
-          <a:lstStyle/>
-          <a:p>
-            <a:pPr algn="l">
-              <a:lnSpc>
-                <a:spcPct val="105000"/>
-              </a:lnSpc>
-              <a:spcBef>
-                <a:spcPts val="0"/>
-              </a:spcBef>
-              <a:spcAft>
-                <a:spcPts val="0"/>
-              </a:spcAft>
-              <a:defRPr sz="750" b="0">
-                <a:solidFill>
-                  <a:srgbClr val="FFFFFF"/>
-                </a:solidFill>
-                <a:latin typeface="DejaVu Sans Mono"/>
-              </a:defRPr>
-            </a:pPr>
-            <a:r>
-              <a:t>    opts:     'defaults'</a:t>
-            </a:r>
-          </a:p>
-        </p:txBody>
-      </p:sp>
-      <p:sp>
-        <p:nvSpPr>
-          <p:cNvPr id="23" name="TextBox 22"/>
-          <p:cNvSpPr txBox="1"/>
-          <p:nvPr/>
-        </p:nvSpPr>
-        <p:spPr>
-          <a:xfrm>
-            <a:off x="768096" y="3657600"/>
-            <a:ext cx="4114800" cy="182880"/>
-          </a:xfrm>
-          <a:prstGeom prst="rect">
-            <a:avLst/>
-          </a:prstGeom>
-          <a:noFill/>
-        </p:spPr>
-        <p:txBody>
-          <a:bodyPr wrap="square" lIns="18288" rIns="18288" tIns="18288" bIns="18288" anchor="t">
-            <a:spAutoFit/>
-          </a:bodyPr>
-          <a:lstStyle/>
-          <a:p>
-            <a:pPr algn="l">
-              <a:lnSpc>
-                <a:spcPct val="105000"/>
-              </a:lnSpc>
-              <a:spcBef>
-                <a:spcPts val="0"/>
-              </a:spcBef>
-              <a:spcAft>
-                <a:spcPts val="0"/>
-              </a:spcAft>
-              <a:defRPr sz="750" b="0">
-                <a:solidFill>
-                  <a:srgbClr val="FFFFFF"/>
-                </a:solidFill>
-                <a:latin typeface="DejaVu Sans Mono"/>
-              </a:defRPr>
-            </a:pPr>
-            <a:r>
-              <a:t>    state:    'mounted'</a:t>
-            </a:r>
-          </a:p>
-        </p:txBody>
-      </p:sp>
-      <p:sp>
-        <p:nvSpPr>
-          <p:cNvPr id="24" name="Chevron 23"/>
+              <a:defRPr sz="950" b="1">
+                <a:solidFill>
+                  <a:srgbClr val="AFC4C6"/>
+                </a:solidFill>
+                <a:latin typeface="Noto Sans"/>
+              </a:defRPr>
+            </a:pPr>
+            <a:r>
+              <a:t>selected version + provider scope</a:t>
+            </a:r>
+          </a:p>
+        </p:txBody>
+      </p:sp>
+      <p:sp>
+        <p:nvSpPr>
+          <p:cNvPr id="15" name="Chevron 14"/>
           <p:cNvSpPr/>
           <p:nvPr/>
         </p:nvSpPr>
@@ -5017,7 +5875,7 @@
       </p:sp>
       <p:sp>
         <p:nvSpPr>
-          <p:cNvPr id="25" name="Rounded Rectangle 24"/>
+          <p:cNvPr id="16" name="Rounded Rectangle 15"/>
           <p:cNvSpPr/>
           <p:nvPr/>
         </p:nvSpPr>
@@ -5060,7 +5918,7 @@
       </p:sp>
       <p:sp>
         <p:nvSpPr>
-          <p:cNvPr id="26" name="TextBox 25"/>
+          <p:cNvPr id="17" name="TextBox 16"/>
           <p:cNvSpPr txBox="1"/>
           <p:nvPr/>
         </p:nvSpPr>
@@ -5098,14 +5956,14 @@
               </a:defRPr>
             </a:pPr>
             <a:r>
-              <a:t>RUNTIME DISCOVERY</a:t>
-            </a:r>
-          </a:p>
-        </p:txBody>
-      </p:sp>
-      <p:sp>
-        <p:nvSpPr>
-          <p:cNvPr id="27" name="Rounded Rectangle 26"/>
+              <a:t>PROVIDER ROOT</a:t>
+            </a:r>
+          </a:p>
+        </p:txBody>
+      </p:sp>
+      <p:sp>
+        <p:nvSpPr>
+          <p:cNvPr id="18" name="Rounded Rectangle 17"/>
           <p:cNvSpPr/>
           <p:nvPr/>
         </p:nvSpPr>
@@ -5148,14 +6006,14 @@
       </p:sp>
       <p:sp>
         <p:nvSpPr>
-          <p:cNvPr id="28" name="TextBox 27"/>
-          <p:cNvSpPr txBox="1"/>
-          <p:nvPr/>
-        </p:nvSpPr>
-        <p:spPr>
-          <a:xfrm>
-            <a:off x="5184648" y="1929384"/>
-            <a:ext cx="1280160" cy="219456"/>
+          <p:cNvPr id="19" name="TextBox 18"/>
+          <p:cNvSpPr txBox="1"/>
+          <p:nvPr/>
+        </p:nvSpPr>
+        <p:spPr>
+          <a:xfrm>
+            <a:off x="5184648" y="1947672"/>
+            <a:ext cx="841248" cy="201168"/>
           </a:xfrm>
           <a:prstGeom prst="rect">
             <a:avLst/>
@@ -5178,7 +6036,7 @@
               <a:spcAft>
                 <a:spcPts val="0"/>
               </a:spcAft>
-              <a:defRPr sz="1100" b="1">
+              <a:defRPr sz="1050" b="1">
                 <a:solidFill>
                   <a:srgbClr val="07595C"/>
                 </a:solidFill>
@@ -5186,34 +6044,34 @@
               </a:defRPr>
             </a:pPr>
             <a:r>
-              <a:t>/dev/sd?</a:t>
-            </a:r>
-          </a:p>
-        </p:txBody>
-      </p:sp>
-      <p:sp>
-        <p:nvSpPr>
-          <p:cNvPr id="29" name="TextBox 28"/>
-          <p:cNvSpPr txBox="1"/>
-          <p:nvPr/>
-        </p:nvSpPr>
-        <p:spPr>
-          <a:xfrm>
-            <a:off x="5184648" y="2157984"/>
-            <a:ext cx="2103120" cy="201168"/>
-          </a:xfrm>
-          <a:prstGeom prst="rect">
-            <a:avLst/>
-          </a:prstGeom>
-          <a:noFill/>
-        </p:spPr>
-        <p:txBody>
-          <a:bodyPr wrap="square" lIns="18288" rIns="18288" tIns="18288" bIns="18288" anchor="t">
-            <a:spAutoFit/>
-          </a:bodyPr>
-          <a:lstStyle/>
-          <a:p>
-            <a:pPr algn="l">
+              <a:t>AWS</a:t>
+            </a:r>
+          </a:p>
+        </p:txBody>
+      </p:sp>
+      <p:sp>
+        <p:nvSpPr>
+          <p:cNvPr id="20" name="TextBox 19"/>
+          <p:cNvSpPr txBox="1"/>
+          <p:nvPr/>
+        </p:nvSpPr>
+        <p:spPr>
+          <a:xfrm>
+            <a:off x="5989320" y="1947672"/>
+            <a:ext cx="1353312" cy="274320"/>
+          </a:xfrm>
+          <a:prstGeom prst="rect">
+            <a:avLst/>
+          </a:prstGeom>
+          <a:noFill/>
+        </p:spPr>
+        <p:txBody>
+          <a:bodyPr wrap="square" lIns="18288" rIns="18288" tIns="18288" bIns="18288" anchor="t">
+            <a:spAutoFit/>
+          </a:bodyPr>
+          <a:lstStyle/>
+          <a:p>
+            <a:pPr algn="r">
               <a:lnSpc>
                 <a:spcPct val="105000"/>
               </a:lnSpc>
@@ -5231,14 +6089,14 @@
               </a:defRPr>
             </a:pPr>
             <a:r>
-              <a:t>VMware, GCP</a:t>
-            </a:r>
-          </a:p>
-        </p:txBody>
-      </p:sp>
-      <p:sp>
-        <p:nvSpPr>
-          <p:cNvPr id="30" name="Rounded Rectangle 29"/>
+              <a:t>AMI -&gt; EC2</a:t>
+            </a:r>
+          </a:p>
+        </p:txBody>
+      </p:sp>
+      <p:sp>
+        <p:nvSpPr>
+          <p:cNvPr id="21" name="Rounded Rectangle 20"/>
           <p:cNvSpPr/>
           <p:nvPr/>
         </p:nvSpPr>
@@ -5281,14 +6139,14 @@
       </p:sp>
       <p:sp>
         <p:nvSpPr>
-          <p:cNvPr id="31" name="TextBox 30"/>
-          <p:cNvSpPr txBox="1"/>
-          <p:nvPr/>
-        </p:nvSpPr>
-        <p:spPr>
-          <a:xfrm>
-            <a:off x="5184648" y="2587752"/>
-            <a:ext cx="1280160" cy="219456"/>
+          <p:cNvPr id="22" name="TextBox 21"/>
+          <p:cNvSpPr txBox="1"/>
+          <p:nvPr/>
+        </p:nvSpPr>
+        <p:spPr>
+          <a:xfrm>
+            <a:off x="5184648" y="2606039"/>
+            <a:ext cx="841248" cy="201168"/>
           </a:xfrm>
           <a:prstGeom prst="rect">
             <a:avLst/>
@@ -5311,7 +6169,7 @@
               <a:spcAft>
                 <a:spcPts val="0"/>
               </a:spcAft>
-              <a:defRPr sz="1100" b="1">
+              <a:defRPr sz="1050" b="1">
                 <a:solidFill>
                   <a:srgbClr val="07595C"/>
                 </a:solidFill>
@@ -5319,34 +6177,34 @@
               </a:defRPr>
             </a:pPr>
             <a:r>
-              <a:t>/dev/vd?</a:t>
-            </a:r>
-          </a:p>
-        </p:txBody>
-      </p:sp>
-      <p:sp>
-        <p:nvSpPr>
-          <p:cNvPr id="32" name="TextBox 31"/>
-          <p:cNvSpPr txBox="1"/>
-          <p:nvPr/>
-        </p:nvSpPr>
-        <p:spPr>
-          <a:xfrm>
-            <a:off x="5184648" y="2816352"/>
-            <a:ext cx="2103120" cy="201168"/>
-          </a:xfrm>
-          <a:prstGeom prst="rect">
-            <a:avLst/>
-          </a:prstGeom>
-          <a:noFill/>
-        </p:spPr>
-        <p:txBody>
-          <a:bodyPr wrap="square" lIns="18288" rIns="18288" tIns="18288" bIns="18288" anchor="t">
-            <a:spAutoFit/>
-          </a:bodyPr>
-          <a:lstStyle/>
-          <a:p>
-            <a:pPr algn="l">
+              <a:t>GCP</a:t>
+            </a:r>
+          </a:p>
+        </p:txBody>
+      </p:sp>
+      <p:sp>
+        <p:nvSpPr>
+          <p:cNvPr id="23" name="TextBox 22"/>
+          <p:cNvSpPr txBox="1"/>
+          <p:nvPr/>
+        </p:nvSpPr>
+        <p:spPr>
+          <a:xfrm>
+            <a:off x="5989320" y="2606039"/>
+            <a:ext cx="1353312" cy="274320"/>
+          </a:xfrm>
+          <a:prstGeom prst="rect">
+            <a:avLst/>
+          </a:prstGeom>
+          <a:noFill/>
+        </p:spPr>
+        <p:txBody>
+          <a:bodyPr wrap="square" lIns="18288" rIns="18288" tIns="18288" bIns="18288" anchor="t">
+            <a:spAutoFit/>
+          </a:bodyPr>
+          <a:lstStyle/>
+          <a:p>
+            <a:pPr algn="r">
               <a:lnSpc>
                 <a:spcPct val="105000"/>
               </a:lnSpc>
@@ -5364,14 +6222,14 @@
               </a:defRPr>
             </a:pPr>
             <a:r>
-              <a:t>OpenStack</a:t>
-            </a:r>
-          </a:p>
-        </p:txBody>
-      </p:sp>
-      <p:sp>
-        <p:nvSpPr>
-          <p:cNvPr id="33" name="Rounded Rectangle 32"/>
+              <a:t>Compute image -&gt; VM</a:t>
+            </a:r>
+          </a:p>
+        </p:txBody>
+      </p:sp>
+      <p:sp>
+        <p:nvSpPr>
+          <p:cNvPr id="24" name="Rounded Rectangle 23"/>
           <p:cNvSpPr/>
           <p:nvPr/>
         </p:nvSpPr>
@@ -5414,14 +6272,14 @@
       </p:sp>
       <p:sp>
         <p:nvSpPr>
-          <p:cNvPr id="34" name="TextBox 33"/>
-          <p:cNvSpPr txBox="1"/>
-          <p:nvPr/>
-        </p:nvSpPr>
-        <p:spPr>
-          <a:xfrm>
-            <a:off x="5184648" y="3246120"/>
-            <a:ext cx="1280160" cy="219456"/>
+          <p:cNvPr id="25" name="TextBox 24"/>
+          <p:cNvSpPr txBox="1"/>
+          <p:nvPr/>
+        </p:nvSpPr>
+        <p:spPr>
+          <a:xfrm>
+            <a:off x="5184648" y="3264408"/>
+            <a:ext cx="841248" cy="201168"/>
           </a:xfrm>
           <a:prstGeom prst="rect">
             <a:avLst/>
@@ -5444,7 +6302,7 @@
               <a:spcAft>
                 <a:spcPts val="0"/>
               </a:spcAft>
-              <a:defRPr sz="1100" b="1">
+              <a:defRPr sz="1050" b="1">
                 <a:solidFill>
                   <a:srgbClr val="07595C"/>
                 </a:solidFill>
@@ -5452,34 +6310,34 @@
               </a:defRPr>
             </a:pPr>
             <a:r>
-              <a:t>/dev/xvd?</a:t>
-            </a:r>
-          </a:p>
-        </p:txBody>
-      </p:sp>
-      <p:sp>
-        <p:nvSpPr>
-          <p:cNvPr id="35" name="TextBox 34"/>
-          <p:cNvSpPr txBox="1"/>
-          <p:nvPr/>
-        </p:nvSpPr>
-        <p:spPr>
-          <a:xfrm>
-            <a:off x="5184648" y="3474720"/>
-            <a:ext cx="2103120" cy="201168"/>
-          </a:xfrm>
-          <a:prstGeom prst="rect">
-            <a:avLst/>
-          </a:prstGeom>
-          <a:noFill/>
-        </p:spPr>
-        <p:txBody>
-          <a:bodyPr wrap="square" lIns="18288" rIns="18288" tIns="18288" bIns="18288" anchor="t">
-            <a:spAutoFit/>
-          </a:bodyPr>
-          <a:lstStyle/>
-          <a:p>
-            <a:pPr algn="l">
+              <a:t>OpenStack</a:t>
+            </a:r>
+          </a:p>
+        </p:txBody>
+      </p:sp>
+      <p:sp>
+        <p:nvSpPr>
+          <p:cNvPr id="26" name="TextBox 25"/>
+          <p:cNvSpPr txBox="1"/>
+          <p:nvPr/>
+        </p:nvSpPr>
+        <p:spPr>
+          <a:xfrm>
+            <a:off x="5989320" y="3264408"/>
+            <a:ext cx="1353312" cy="274320"/>
+          </a:xfrm>
+          <a:prstGeom prst="rect">
+            <a:avLst/>
+          </a:prstGeom>
+          <a:noFill/>
+        </p:spPr>
+        <p:txBody>
+          <a:bodyPr wrap="square" lIns="18288" rIns="18288" tIns="18288" bIns="18288" anchor="t">
+            <a:spAutoFit/>
+          </a:bodyPr>
+          <a:lstStyle/>
+          <a:p>
+            <a:pPr algn="r">
               <a:lnSpc>
                 <a:spcPct val="105000"/>
               </a:lnSpc>
@@ -5497,14 +6355,14 @@
               </a:defRPr>
             </a:pPr>
             <a:r>
-              <a:t>AWS Xen</a:t>
-            </a:r>
-          </a:p>
-        </p:txBody>
-      </p:sp>
-      <p:sp>
-        <p:nvSpPr>
-          <p:cNvPr id="36" name="Rounded Rectangle 35"/>
+              <a:t>Glance image -&gt; Nova</a:t>
+            </a:r>
+          </a:p>
+        </p:txBody>
+      </p:sp>
+      <p:sp>
+        <p:nvSpPr>
+          <p:cNvPr id="27" name="Rounded Rectangle 26"/>
           <p:cNvSpPr/>
           <p:nvPr/>
         </p:nvSpPr>
@@ -5547,14 +6405,14 @@
       </p:sp>
       <p:sp>
         <p:nvSpPr>
-          <p:cNvPr id="37" name="TextBox 36"/>
-          <p:cNvSpPr txBox="1"/>
-          <p:nvPr/>
-        </p:nvSpPr>
-        <p:spPr>
-          <a:xfrm>
-            <a:off x="5184648" y="3904487"/>
-            <a:ext cx="1280160" cy="219456"/>
+          <p:cNvPr id="28" name="TextBox 27"/>
+          <p:cNvSpPr txBox="1"/>
+          <p:nvPr/>
+        </p:nvSpPr>
+        <p:spPr>
+          <a:xfrm>
+            <a:off x="5184648" y="3922776"/>
+            <a:ext cx="841248" cy="201168"/>
           </a:xfrm>
           <a:prstGeom prst="rect">
             <a:avLst/>
@@ -5577,7 +6435,7 @@
               <a:spcAft>
                 <a:spcPts val="0"/>
               </a:spcAft>
-              <a:defRPr sz="1100" b="1">
+              <a:defRPr sz="1050" b="1">
                 <a:solidFill>
                   <a:srgbClr val="07595C"/>
                 </a:solidFill>
@@ -5585,34 +6443,34 @@
               </a:defRPr>
             </a:pPr>
             <a:r>
-              <a:t>/dev/nvme?n?</a:t>
-            </a:r>
-          </a:p>
-        </p:txBody>
-      </p:sp>
-      <p:sp>
-        <p:nvSpPr>
-          <p:cNvPr id="38" name="TextBox 37"/>
-          <p:cNvSpPr txBox="1"/>
-          <p:nvPr/>
-        </p:nvSpPr>
-        <p:spPr>
-          <a:xfrm>
-            <a:off x="5184648" y="4133087"/>
-            <a:ext cx="2103120" cy="201168"/>
-          </a:xfrm>
-          <a:prstGeom prst="rect">
-            <a:avLst/>
-          </a:prstGeom>
-          <a:noFill/>
-        </p:spPr>
-        <p:txBody>
-          <a:bodyPr wrap="square" lIns="18288" rIns="18288" tIns="18288" bIns="18288" anchor="t">
-            <a:spAutoFit/>
-          </a:bodyPr>
-          <a:lstStyle/>
-          <a:p>
-            <a:pPr algn="l">
+              <a:t>vSphere</a:t>
+            </a:r>
+          </a:p>
+        </p:txBody>
+      </p:sp>
+      <p:sp>
+        <p:nvSpPr>
+          <p:cNvPr id="29" name="TextBox 28"/>
+          <p:cNvSpPr txBox="1"/>
+          <p:nvPr/>
+        </p:nvSpPr>
+        <p:spPr>
+          <a:xfrm>
+            <a:off x="5989320" y="3922776"/>
+            <a:ext cx="1353312" cy="274320"/>
+          </a:xfrm>
+          <a:prstGeom prst="rect">
+            <a:avLst/>
+          </a:prstGeom>
+          <a:noFill/>
+        </p:spPr>
+        <p:txBody>
+          <a:bodyPr wrap="square" lIns="18288" rIns="18288" tIns="18288" bIns="18288" anchor="t">
+            <a:spAutoFit/>
+          </a:bodyPr>
+          <a:lstStyle/>
+          <a:p>
+            <a:pPr algn="r">
               <a:lnSpc>
                 <a:spcPct val="105000"/>
               </a:lnSpc>
@@ -5630,14 +6488,14 @@
               </a:defRPr>
             </a:pPr>
             <a:r>
-              <a:t>AWS Nitro</a:t>
-            </a:r>
-          </a:p>
-        </p:txBody>
-      </p:sp>
-      <p:sp>
-        <p:nvSpPr>
-          <p:cNvPr id="39" name="TextBox 38"/>
+              <a:t>template -&gt; clone</a:t>
+            </a:r>
+          </a:p>
+        </p:txBody>
+      </p:sp>
+      <p:sp>
+        <p:nvSpPr>
+          <p:cNvPr id="30" name="TextBox 29"/>
           <p:cNvSpPr txBox="1"/>
           <p:nvPr/>
         </p:nvSpPr>
@@ -5667,7 +6525,7 @@
               <a:spcAft>
                 <a:spcPts val="0"/>
               </a:spcAft>
-              <a:defRPr sz="1100" b="1">
+              <a:defRPr sz="1050" b="1">
                 <a:solidFill>
                   <a:srgbClr val="5C6A70"/>
                 </a:solidFill>
@@ -5675,14 +6533,14 @@
               </a:defRPr>
             </a:pPr>
             <a:r>
-              <a:t>getdevs role: match by position</a:t>
-            </a:r>
-          </a:p>
-        </p:txBody>
-      </p:sp>
-      <p:sp>
-        <p:nvSpPr>
-          <p:cNvPr id="40" name="Chevron 39"/>
+              <a:t>provider-specific resources</a:t>
+            </a:r>
+          </a:p>
+        </p:txBody>
+      </p:sp>
+      <p:sp>
+        <p:nvSpPr>
+          <p:cNvPr id="31" name="Chevron 30"/>
           <p:cNvSpPr/>
           <p:nvPr/>
         </p:nvSpPr>
@@ -5725,7 +6583,7 @@
       </p:sp>
       <p:sp>
         <p:nvSpPr>
-          <p:cNvPr id="41" name="Rounded Rectangle 40"/>
+          <p:cNvPr id="32" name="Rounded Rectangle 31"/>
           <p:cNvSpPr/>
           <p:nvPr/>
         </p:nvSpPr>
@@ -5768,7 +6626,7 @@
       </p:sp>
       <p:sp>
         <p:nvSpPr>
-          <p:cNvPr id="42" name="TextBox 41"/>
+          <p:cNvPr id="33" name="TextBox 32"/>
           <p:cNvSpPr txBox="1"/>
           <p:nvPr/>
         </p:nvSpPr>
@@ -5806,20 +6664,20 @@
               </a:defRPr>
             </a:pPr>
             <a:r>
-              <a:t>OUTCOME</a:t>
-            </a:r>
-          </a:p>
-        </p:txBody>
-      </p:sp>
-      <p:sp>
-        <p:nvSpPr>
-          <p:cNvPr id="43" name="Rounded Rectangle 42"/>
+              <a:t>TERRAFORM CYCLE</a:t>
+            </a:r>
+          </a:p>
+        </p:txBody>
+      </p:sp>
+      <p:sp>
+        <p:nvSpPr>
+          <p:cNvPr id="34" name="Rounded Rectangle 33"/>
           <p:cNvSpPr/>
           <p:nvPr/>
         </p:nvSpPr>
         <p:spPr>
           <a:xfrm>
-            <a:off x="8028431" y="1938528"/>
+            <a:off x="8028431" y="2240280"/>
             <a:ext cx="960120" cy="658368"/>
           </a:xfrm>
           <a:prstGeom prst="roundRect">
@@ -5858,13 +6716,13 @@
       </p:sp>
       <p:sp>
         <p:nvSpPr>
-          <p:cNvPr id="44" name="TextBox 43"/>
-          <p:cNvSpPr txBox="1"/>
-          <p:nvPr/>
-        </p:nvSpPr>
-        <p:spPr>
-          <a:xfrm>
-            <a:off x="8028431" y="2139696"/>
+          <p:cNvPr id="35" name="TextBox 34"/>
+          <p:cNvSpPr txBox="1"/>
+          <p:nvPr/>
+        </p:nvSpPr>
+        <p:spPr>
+          <a:xfrm>
+            <a:off x="8028431" y="2441448"/>
             <a:ext cx="960120" cy="228600"/>
           </a:xfrm>
           <a:prstGeom prst="rect">
@@ -5888,7 +6746,7 @@
               <a:spcAft>
                 <a:spcPts val="0"/>
               </a:spcAft>
-              <a:defRPr sz="1000" b="1">
+              <a:defRPr sz="950" b="1">
                 <a:solidFill>
                   <a:srgbClr val="3978A8"/>
                 </a:solidFill>
@@ -5896,21 +6754,21 @@
               </a:defRPr>
             </a:pPr>
             <a:r>
-              <a:t>DISK</a:t>
+              <a:t>PLAN</a:t>
             </a:r>
           </a:p>
         </p:txBody>
       </p:sp>
       <p:cxnSp>
         <p:nvCxnSpPr>
-          <p:cNvPr id="45" name="Connector 44"/>
+          <p:cNvPr id="36" name="Connector 35"/>
           <p:cNvCxnSpPr/>
           <p:nvPr/>
         </p:nvCxnSpPr>
         <p:spPr>
           <a:xfrm>
-            <a:off x="8988552" y="2267712"/>
-            <a:ext cx="210311" cy="0"/>
+            <a:off x="8988552" y="2569464"/>
+            <a:ext cx="182880" cy="0"/>
           </a:xfrm>
           <a:prstGeom prst="line">
             <a:avLst/>
@@ -5938,13 +6796,13 @@
       </p:cxnSp>
       <p:sp>
         <p:nvSpPr>
-          <p:cNvPr id="46" name="Rounded Rectangle 45"/>
+          <p:cNvPr id="37" name="Rounded Rectangle 36"/>
           <p:cNvSpPr/>
           <p:nvPr/>
         </p:nvSpPr>
         <p:spPr>
           <a:xfrm>
-            <a:off x="9198863" y="1938528"/>
+            <a:off x="9198863" y="2240280"/>
             <a:ext cx="960120" cy="658368"/>
           </a:xfrm>
           <a:prstGeom prst="roundRect">
@@ -5983,13 +6841,13 @@
       </p:sp>
       <p:sp>
         <p:nvSpPr>
-          <p:cNvPr id="47" name="TextBox 46"/>
-          <p:cNvSpPr txBox="1"/>
-          <p:nvPr/>
-        </p:nvSpPr>
-        <p:spPr>
-          <a:xfrm>
-            <a:off x="9198863" y="2139696"/>
+          <p:cNvPr id="38" name="TextBox 37"/>
+          <p:cNvSpPr txBox="1"/>
+          <p:nvPr/>
+        </p:nvSpPr>
+        <p:spPr>
+          <a:xfrm>
+            <a:off x="9198863" y="2441448"/>
             <a:ext cx="960120" cy="228600"/>
           </a:xfrm>
           <a:prstGeom prst="rect">
@@ -6013,7 +6871,7 @@
               <a:spcAft>
                 <a:spcPts val="0"/>
               </a:spcAft>
-              <a:defRPr sz="1000" b="1">
+              <a:defRPr sz="950" b="1">
                 <a:solidFill>
                   <a:srgbClr val="087E82"/>
                 </a:solidFill>
@@ -6021,21 +6879,21 @@
               </a:defRPr>
             </a:pPr>
             <a:r>
-              <a:t>PV</a:t>
+              <a:t>APPLY</a:t>
             </a:r>
           </a:p>
         </p:txBody>
       </p:sp>
       <p:cxnSp>
         <p:nvCxnSpPr>
-          <p:cNvPr id="48" name="Connector 47"/>
+          <p:cNvPr id="39" name="Connector 38"/>
           <p:cNvCxnSpPr/>
           <p:nvPr/>
         </p:nvCxnSpPr>
         <p:spPr>
           <a:xfrm>
-            <a:off x="10158984" y="2267712"/>
-            <a:ext cx="210312" cy="0"/>
+            <a:off x="10158984" y="2569464"/>
+            <a:ext cx="182879" cy="0"/>
           </a:xfrm>
           <a:prstGeom prst="line">
             <a:avLst/>
@@ -6063,103 +6921,13 @@
       </p:cxnSp>
       <p:sp>
         <p:nvSpPr>
-          <p:cNvPr id="49" name="Rounded Rectangle 48"/>
+          <p:cNvPr id="40" name="Rounded Rectangle 39"/>
           <p:cNvSpPr/>
           <p:nvPr/>
         </p:nvSpPr>
         <p:spPr>
           <a:xfrm>
-            <a:off x="10369296" y="1938528"/>
-            <a:ext cx="960120" cy="658368"/>
-          </a:xfrm>
-          <a:prstGeom prst="roundRect">
-            <a:avLst/>
-          </a:prstGeom>
-          <a:solidFill>
-            <a:srgbClr val="FFFFFF"/>
-          </a:solidFill>
-          <a:ln w="12700">
-            <a:solidFill>
-              <a:srgbClr val="D95D43"/>
-            </a:solidFill>
-          </a:ln>
-        </p:spPr>
-        <p:style>
-          <a:lnRef idx="1">
-            <a:schemeClr val="accent1"/>
-          </a:lnRef>
-          <a:fillRef idx="3">
-            <a:schemeClr val="accent1"/>
-          </a:fillRef>
-          <a:effectRef idx="2">
-            <a:schemeClr val="accent1"/>
-          </a:effectRef>
-          <a:fontRef idx="minor">
-            <a:schemeClr val="lt1"/>
-          </a:fontRef>
-        </p:style>
-        <p:txBody>
-          <a:bodyPr rtlCol="0" anchor="ctr"/>
-          <a:lstStyle/>
-          <a:p>
-            <a:pPr algn="ctr"/>
-          </a:p>
-        </p:txBody>
-      </p:sp>
-      <p:sp>
-        <p:nvSpPr>
-          <p:cNvPr id="50" name="TextBox 49"/>
-          <p:cNvSpPr txBox="1"/>
-          <p:nvPr/>
-        </p:nvSpPr>
-        <p:spPr>
-          <a:xfrm>
-            <a:off x="10369296" y="2139696"/>
-            <a:ext cx="960120" cy="228600"/>
-          </a:xfrm>
-          <a:prstGeom prst="rect">
-            <a:avLst/>
-          </a:prstGeom>
-          <a:noFill/>
-        </p:spPr>
-        <p:txBody>
-          <a:bodyPr wrap="square" lIns="18288" rIns="18288" tIns="18288" bIns="18288" anchor="t">
-            <a:spAutoFit/>
-          </a:bodyPr>
-          <a:lstStyle/>
-          <a:p>
-            <a:pPr algn="ctr">
-              <a:lnSpc>
-                <a:spcPct val="105000"/>
-              </a:lnSpc>
-              <a:spcBef>
-                <a:spcPts val="0"/>
-              </a:spcBef>
-              <a:spcAft>
-                <a:spcPts val="0"/>
-              </a:spcAft>
-              <a:defRPr sz="1000" b="1">
-                <a:solidFill>
-                  <a:srgbClr val="D95D43"/>
-                </a:solidFill>
-                <a:latin typeface="Noto Sans"/>
-              </a:defRPr>
-            </a:pPr>
-            <a:r>
-              <a:t>VG</a:t>
-            </a:r>
-          </a:p>
-        </p:txBody>
-      </p:sp>
-      <p:sp>
-        <p:nvSpPr>
-          <p:cNvPr id="51" name="Rounded Rectangle 50"/>
-          <p:cNvSpPr/>
-          <p:nvPr/>
-        </p:nvSpPr>
-        <p:spPr>
-          <a:xfrm>
-            <a:off x="8028431" y="3035808"/>
+            <a:off x="10369296" y="2240280"/>
             <a:ext cx="960120" cy="658368"/>
           </a:xfrm>
           <a:prstGeom prst="roundRect">
@@ -6198,13 +6966,13 @@
       </p:sp>
       <p:sp>
         <p:nvSpPr>
-          <p:cNvPr id="52" name="TextBox 51"/>
-          <p:cNvSpPr txBox="1"/>
-          <p:nvPr/>
-        </p:nvSpPr>
-        <p:spPr>
-          <a:xfrm>
-            <a:off x="8028431" y="3236976"/>
+          <p:cNvPr id="41" name="TextBox 40"/>
+          <p:cNvSpPr txBox="1"/>
+          <p:nvPr/>
+        </p:nvSpPr>
+        <p:spPr>
+          <a:xfrm>
+            <a:off x="10369296" y="2441448"/>
             <a:ext cx="960120" cy="228600"/>
           </a:xfrm>
           <a:prstGeom prst="rect">
@@ -6228,7 +6996,7 @@
               <a:spcAft>
                 <a:spcPts val="0"/>
               </a:spcAft>
-              <a:defRPr sz="1000" b="1">
+              <a:defRPr sz="950" b="1">
                 <a:solidFill>
                   <a:srgbClr val="4D8766"/>
                 </a:solidFill>
@@ -6236,145 +7004,20 @@
               </a:defRPr>
             </a:pPr>
             <a:r>
-              <a:t>LV</a:t>
-            </a:r>
-          </a:p>
-        </p:txBody>
-      </p:sp>
-      <p:cxnSp>
-        <p:nvCxnSpPr>
-          <p:cNvPr id="53" name="Connector 52"/>
-          <p:cNvCxnSpPr/>
-          <p:nvPr/>
-        </p:nvCxnSpPr>
-        <p:spPr>
-          <a:xfrm>
-            <a:off x="8988552" y="3364992"/>
-            <a:ext cx="210311" cy="0"/>
-          </a:xfrm>
-          <a:prstGeom prst="line">
-            <a:avLst/>
-          </a:prstGeom>
-          <a:ln w="25400">
-            <a:solidFill>
-              <a:srgbClr val="CAD2D0"/>
-            </a:solidFill>
-          </a:ln>
-        </p:spPr>
-        <p:style>
-          <a:lnRef idx="2">
-            <a:schemeClr val="accent1"/>
-          </a:lnRef>
-          <a:fillRef idx="0">
-            <a:schemeClr val="accent1"/>
-          </a:fillRef>
-          <a:effectRef idx="1">
-            <a:schemeClr val="accent1"/>
-          </a:effectRef>
-          <a:fontRef idx="minor">
-            <a:schemeClr val="tx1"/>
-          </a:fontRef>
-        </p:style>
-      </p:cxnSp>
-      <p:sp>
-        <p:nvSpPr>
-          <p:cNvPr id="54" name="Rounded Rectangle 53"/>
+              <a:t>STATE</a:t>
+            </a:r>
+          </a:p>
+        </p:txBody>
+      </p:sp>
+      <p:sp>
+        <p:nvSpPr>
+          <p:cNvPr id="42" name="Rounded Rectangle 41"/>
           <p:cNvSpPr/>
           <p:nvPr/>
         </p:nvSpPr>
         <p:spPr>
           <a:xfrm>
-            <a:off x="9198863" y="3035808"/>
-            <a:ext cx="960120" cy="658368"/>
-          </a:xfrm>
-          <a:prstGeom prst="roundRect">
-            <a:avLst/>
-          </a:prstGeom>
-          <a:solidFill>
-            <a:srgbClr val="FFFFFF"/>
-          </a:solidFill>
-          <a:ln w="12700">
-            <a:solidFill>
-              <a:srgbClr val="E4AD3A"/>
-            </a:solidFill>
-          </a:ln>
-        </p:spPr>
-        <p:style>
-          <a:lnRef idx="1">
-            <a:schemeClr val="accent1"/>
-          </a:lnRef>
-          <a:fillRef idx="3">
-            <a:schemeClr val="accent1"/>
-          </a:fillRef>
-          <a:effectRef idx="2">
-            <a:schemeClr val="accent1"/>
-          </a:effectRef>
-          <a:fontRef idx="minor">
-            <a:schemeClr val="lt1"/>
-          </a:fontRef>
-        </p:style>
-        <p:txBody>
-          <a:bodyPr rtlCol="0" anchor="ctr"/>
-          <a:lstStyle/>
-          <a:p>
-            <a:pPr algn="ctr"/>
-          </a:p>
-        </p:txBody>
-      </p:sp>
-      <p:sp>
-        <p:nvSpPr>
-          <p:cNvPr id="55" name="TextBox 54"/>
-          <p:cNvSpPr txBox="1"/>
-          <p:nvPr/>
-        </p:nvSpPr>
-        <p:spPr>
-          <a:xfrm>
-            <a:off x="9198863" y="3236976"/>
-            <a:ext cx="960120" cy="228600"/>
-          </a:xfrm>
-          <a:prstGeom prst="rect">
-            <a:avLst/>
-          </a:prstGeom>
-          <a:noFill/>
-        </p:spPr>
-        <p:txBody>
-          <a:bodyPr wrap="square" lIns="18288" rIns="18288" tIns="18288" bIns="18288" anchor="t">
-            <a:spAutoFit/>
-          </a:bodyPr>
-          <a:lstStyle/>
-          <a:p>
-            <a:pPr algn="ctr">
-              <a:lnSpc>
-                <a:spcPct val="105000"/>
-              </a:lnSpc>
-              <a:spcBef>
-                <a:spcPts val="0"/>
-              </a:spcBef>
-              <a:spcAft>
-                <a:spcPts val="0"/>
-              </a:spcAft>
-              <a:defRPr sz="1000" b="1">
-                <a:solidFill>
-                  <a:srgbClr val="E4AD3A"/>
-                </a:solidFill>
-                <a:latin typeface="Noto Sans"/>
-              </a:defRPr>
-            </a:pPr>
-            <a:r>
-              <a:t>MOUNT</a:t>
-            </a:r>
-          </a:p>
-        </p:txBody>
-      </p:sp>
-      <p:sp>
-        <p:nvSpPr>
-          <p:cNvPr id="56" name="Rounded Rectangle 55"/>
-          <p:cNvSpPr/>
-          <p:nvPr/>
-        </p:nvSpPr>
-        <p:spPr>
-          <a:xfrm>
-            <a:off x="8028431" y="4251960"/>
+            <a:off x="8028431" y="3337560"/>
             <a:ext cx="3493008" cy="841248"/>
           </a:xfrm>
           <a:prstGeom prst="roundRect">
@@ -6411,13 +7054,13 @@
       </p:sp>
       <p:sp>
         <p:nvSpPr>
-          <p:cNvPr id="57" name="TextBox 56"/>
-          <p:cNvSpPr txBox="1"/>
-          <p:nvPr/>
-        </p:nvSpPr>
-        <p:spPr>
-          <a:xfrm>
-            <a:off x="8229600" y="4407408"/>
+          <p:cNvPr id="43" name="TextBox 42"/>
+          <p:cNvSpPr txBox="1"/>
+          <p:nvPr/>
+        </p:nvSpPr>
+        <p:spPr>
+          <a:xfrm>
+            <a:off x="8229600" y="3493008"/>
             <a:ext cx="3090672" cy="548640"/>
           </a:xfrm>
           <a:prstGeom prst="rect">
@@ -6449,14 +7092,14 @@
               </a:defRPr>
             </a:pPr>
             <a:r>
-              <a:t>the same declaration works on every guest device naming scheme</a:t>
-            </a:r>
-          </a:p>
-        </p:txBody>
-      </p:sp>
-      <p:sp>
-        <p:nvSpPr>
-          <p:cNvPr id="58" name="TextBox 57"/>
+              <a:t>Catalog identity follows each deployment.</a:t>
+            </a:r>
+          </a:p>
+        </p:txBody>
+      </p:sp>
+      <p:sp>
+        <p:nvSpPr>
+          <p:cNvPr id="44" name="TextBox 43"/>
           <p:cNvSpPr txBox="1"/>
           <p:nvPr/>
         </p:nvSpPr>
@@ -6501,7 +7144,7 @@
       </p:sp>
       <p:sp>
         <p:nvSpPr>
-          <p:cNvPr id="59" name="TextBox 58"/>
+          <p:cNvPr id="45" name="TextBox 44"/>
           <p:cNvSpPr txBox="1"/>
           <p:nvPr/>
         </p:nvSpPr>
@@ -6655,7 +7298,7 @@
               </a:defRPr>
             </a:pPr>
             <a:r>
-              <a:t>OPERATOR EXPERIENCE</a:t>
+              <a:t>TERRAFORM COMMANDS</a:t>
             </a:r>
           </a:p>
         </p:txBody>
@@ -6700,7 +7343,7 @@
               </a:defRPr>
             </a:pPr>
             <a:r>
-              <a:t>Simple commands, reusable implementation</a:t>
+              <a:t>A simple workflow across provider roots</a:t>
             </a:r>
           </a:p>
         </p:txBody>
@@ -6788,7 +7431,7 @@
               </a:defRPr>
             </a:pPr>
             <a:r>
-              <a:t>DEPLOY</a:t>
+              <a:t>SELECT</a:t>
             </a:r>
           </a:p>
         </p:txBody>
@@ -6868,7 +7511,7 @@
               <a:spcAft>
                 <a:spcPts val="0"/>
               </a:spcAft>
-              <a:defRPr sz="1200" b="1">
+              <a:defRPr sz="1050" b="1">
                 <a:solidFill>
                   <a:srgbClr val="17242A"/>
                 </a:solidFill>
@@ -6876,7 +7519,7 @@
               </a:defRPr>
             </a:pPr>
             <a:r>
-              <a:t>deploy-ova.sh</a:t>
+              <a:t>browse image catalog</a:t>
             </a:r>
           </a:p>
         </p:txBody>
@@ -6913,7 +7556,7 @@
               <a:spcAft>
                 <a:spcPts val="0"/>
               </a:spcAft>
-              <a:defRPr sz="1200" b="0">
+              <a:defRPr sz="1050" b="0">
                 <a:solidFill>
                   <a:srgbClr val="17242A"/>
                 </a:solidFill>
@@ -6921,7 +7564,7 @@
               </a:defRPr>
             </a:pPr>
             <a:r>
-              <a:t>deploy-template.sh</a:t>
+              <a:t>generate-*-tfvars.py</a:t>
             </a:r>
           </a:p>
         </p:txBody>
@@ -6958,15 +7601,15 @@
               <a:spcAft>
                 <a:spcPts val="0"/>
               </a:spcAft>
-              <a:defRPr sz="1200" b="0">
+              <a:defRPr sz="1050" b="0">
                 <a:solidFill>
                   <a:srgbClr val="17242A"/>
                 </a:solidFill>
-                <a:latin typeface="DejaVu Sans Mono"/>
-              </a:defRPr>
-            </a:pPr>
-            <a:r>
-              <a:t>set-hostname.sh</a:t>
+                <a:latin typeface="Noto Sans"/>
+              </a:defRPr>
+            </a:pPr>
+            <a:r>
+              <a:t>choose provider scope</a:t>
             </a:r>
           </a:p>
         </p:txBody>
@@ -7011,7 +7654,7 @@
               </a:defRPr>
             </a:pPr>
             <a:r>
-              <a:t>CHANGE</a:t>
+              <a:t>PLAN</a:t>
             </a:r>
           </a:p>
         </p:txBody>
@@ -7091,7 +7734,7 @@
               <a:spcAft>
                 <a:spcPts val="0"/>
               </a:spcAft>
-              <a:defRPr sz="1200" b="1">
+              <a:defRPr sz="1050" b="1">
                 <a:solidFill>
                   <a:srgbClr val="17242A"/>
                 </a:solidFill>
@@ -7099,7 +7742,7 @@
               </a:defRPr>
             </a:pPr>
             <a:r>
-              <a:t>resize-hardware.sh</a:t>
+              <a:t>terraform-aws.py plan</a:t>
             </a:r>
           </a:p>
         </p:txBody>
@@ -7136,7 +7779,7 @@
               <a:spcAft>
                 <a:spcPts val="0"/>
               </a:spcAft>
-              <a:defRPr sz="1200" b="0">
+              <a:defRPr sz="1050" b="0">
                 <a:solidFill>
                   <a:srgbClr val="17242A"/>
                 </a:solidFill>
@@ -7144,7 +7787,7 @@
               </a:defRPr>
             </a:pPr>
             <a:r>
-              <a:t>resize-volumes.sh</a:t>
+              <a:t>terraform-gcp.py plan</a:t>
             </a:r>
           </a:p>
         </p:txBody>
@@ -7181,15 +7824,15 @@
               <a:spcAft>
                 <a:spcPts val="0"/>
               </a:spcAft>
-              <a:defRPr sz="1200" b="0">
+              <a:defRPr sz="1050" b="0">
                 <a:solidFill>
                   <a:srgbClr val="17242A"/>
                 </a:solidFill>
-                <a:latin typeface="DejaVu Sans Mono"/>
-              </a:defRPr>
-            </a:pPr>
-            <a:r>
-              <a:t>networks.sh</a:t>
+                <a:latin typeface="Noto Sans"/>
+              </a:defRPr>
+            </a:pPr>
+            <a:r>
+              <a:t>review planned changes</a:t>
             </a:r>
           </a:p>
         </p:txBody>
@@ -7234,7 +7877,7 @@
               </a:defRPr>
             </a:pPr>
             <a:r>
-              <a:t>OBSERVE</a:t>
+              <a:t>APPLY</a:t>
             </a:r>
           </a:p>
         </p:txBody>
@@ -7314,7 +7957,7 @@
               <a:spcAft>
                 <a:spcPts val="0"/>
               </a:spcAft>
-              <a:defRPr sz="1200" b="1">
+              <a:defRPr sz="1050" b="1">
                 <a:solidFill>
                   <a:srgbClr val="17242A"/>
                 </a:solidFill>
@@ -7322,7 +7965,7 @@
               </a:defRPr>
             </a:pPr>
             <a:r>
-              <a:t>guest-info.sh</a:t>
+              <a:t>terraform-openstack.py apply</a:t>
             </a:r>
           </a:p>
         </p:txBody>
@@ -7359,7 +8002,7 @@
               <a:spcAft>
                 <a:spcPts val="0"/>
               </a:spcAft>
-              <a:defRPr sz="1200" b="0">
+              <a:defRPr sz="1050" b="0">
                 <a:solidFill>
                   <a:srgbClr val="17242A"/>
                 </a:solidFill>
@@ -7367,7 +8010,7 @@
               </a:defRPr>
             </a:pPr>
             <a:r>
-              <a:t>host-info.sh</a:t>
+              <a:t>terraform-vsphere.py apply</a:t>
             </a:r>
           </a:p>
         </p:txBody>
@@ -7404,15 +8047,15 @@
               <a:spcAft>
                 <a:spcPts val="0"/>
               </a:spcAft>
-              <a:defRPr sz="1200" b="0">
+              <a:defRPr sz="1050" b="0">
                 <a:solidFill>
                   <a:srgbClr val="17242A"/>
                 </a:solidFill>
-                <a:latin typeface="DejaVu Sans Mono"/>
-              </a:defRPr>
-            </a:pPr>
-            <a:r>
-              <a:t>node-exporter.sh</a:t>
+                <a:latin typeface="Noto Sans"/>
+              </a:defRPr>
+            </a:pPr>
+            <a:r>
+              <a:t>after plan review</a:t>
             </a:r>
           </a:p>
         </p:txBody>
@@ -7457,7 +8100,7 @@
               </a:defRPr>
             </a:pPr>
             <a:r>
-              <a:t>RECOVER</a:t>
+              <a:t>STATE</a:t>
             </a:r>
           </a:p>
         </p:txBody>
@@ -7537,7 +8180,7 @@
               <a:spcAft>
                 <a:spcPts val="0"/>
               </a:spcAft>
-              <a:defRPr sz="1200" b="1">
+              <a:defRPr sz="1050" b="1">
                 <a:solidFill>
                   <a:srgbClr val="17242A"/>
                 </a:solidFill>
@@ -7545,7 +8188,7 @@
               </a:defRPr>
             </a:pPr>
             <a:r>
-              <a:t>vmware-snapshot.sh</a:t>
+              <a:t>workspace select/new</a:t>
             </a:r>
           </a:p>
         </p:txBody>
@@ -7582,7 +8225,7 @@
               <a:spcAft>
                 <a:spcPts val="0"/>
               </a:spcAft>
-              <a:defRPr sz="1200" b="0">
+              <a:defRPr sz="1050" b="0">
                 <a:solidFill>
                   <a:srgbClr val="17242A"/>
                 </a:solidFill>
@@ -7590,7 +8233,7 @@
               </a:defRPr>
             </a:pPr>
             <a:r>
-              <a:t>power-off.sh / power-on.sh</a:t>
+              <a:t>backup-terraform-state.py</a:t>
             </a:r>
           </a:p>
         </p:txBody>
@@ -7627,15 +8270,15 @@
               <a:spcAft>
                 <a:spcPts val="0"/>
               </a:spcAft>
-              <a:defRPr sz="1200" b="0">
+              <a:defRPr sz="1050" b="0">
                 <a:solidFill>
                   <a:srgbClr val="17242A"/>
                 </a:solidFill>
-                <a:latin typeface="DejaVu Sans Mono"/>
-              </a:defRPr>
-            </a:pPr>
-            <a:r>
-              <a:t>vmotion-vm.sh</a:t>
+                <a:latin typeface="Noto Sans"/>
+              </a:defRPr>
+            </a:pPr>
+            <a:r>
+              <a:t>state outside Git</a:t>
             </a:r>
           </a:p>
         </p:txBody>
@@ -7760,7 +8403,7 @@
               <a:spcAft>
                 <a:spcPts val="0"/>
               </a:spcAft>
-              <a:defRPr sz="1700" b="1">
+              <a:defRPr sz="1600" b="1">
                 <a:solidFill>
                   <a:srgbClr val="FFFFFF"/>
                 </a:solidFill>
@@ -7768,7 +8411,7 @@
               </a:defRPr>
             </a:pPr>
             <a:r>
-              <a:t>one clear wrapper</a:t>
+              <a:t>catalog + launch inputs</a:t>
             </a:r>
           </a:p>
         </p:txBody>
@@ -7893,7 +8536,7 @@
               <a:spcAft>
                 <a:spcPts val="0"/>
               </a:spcAft>
-              <a:defRPr sz="1700" b="1">
+              <a:defRPr sz="1600" b="1">
                 <a:solidFill>
                   <a:srgbClr val="FFFFFF"/>
                 </a:solidFill>
@@ -7901,7 +8544,7 @@
               </a:defRPr>
             </a:pPr>
             <a:r>
-              <a:t>idempotent role</a:t>
+              <a:t>provider root + Vault</a:t>
             </a:r>
           </a:p>
         </p:txBody>
@@ -8026,7 +8669,7 @@
               <a:spcAft>
                 <a:spcPts val="0"/>
               </a:spcAft>
-              <a:defRPr sz="1700" b="1">
+              <a:defRPr sz="1600" b="1">
                 <a:solidFill>
                   <a:srgbClr val="FFFFFF"/>
                 </a:solidFill>
@@ -8034,7 +8677,7 @@
               </a:defRPr>
             </a:pPr>
             <a:r>
-              <a:t>repeatable change</a:t>
+              <a:t>reviewable instance</a:t>
             </a:r>
           </a:p>
         </p:txBody>
@@ -8079,7 +8722,7 @@
               </a:defRPr>
             </a:pPr>
             <a:r>
-              <a:t>36 wrappers in bin/, one per playbook. Each one sets up the run; the role does the work.</a:t>
+              <a:t>Provider runners retrieve credentials from Vault and execute Terraform.</a:t>
             </a:r>
           </a:p>
         </p:txBody>
@@ -8285,7 +8928,7 @@
               </a:defRPr>
             </a:pPr>
             <a:r>
-              <a:t>WORKLOAD OPTIMIZATION</a:t>
+              <a:t>TERRAFORM GUARDRAILS</a:t>
             </a:r>
           </a:p>
         </p:txBody>
@@ -8330,7 +8973,7 @@
               </a:defRPr>
             </a:pPr>
             <a:r>
-              <a:t>Tune with evidence</a:t>
+              <a:t>Deploy with clear boundaries</a:t>
             </a:r>
           </a:p>
         </p:txBody>
@@ -8418,7 +9061,7 @@
               </a:defRPr>
             </a:pPr>
             <a:r>
-              <a:t>CHOICE</a:t>
+              <a:t>STEP</a:t>
             </a:r>
           </a:p>
         </p:txBody>
@@ -8508,7 +9151,7 @@
               </a:defRPr>
             </a:pPr>
             <a:r>
-              <a:t>VERIFY</a:t>
+              <a:t>CHECK</a:t>
             </a:r>
           </a:p>
         </p:txBody>
@@ -8598,7 +9241,7 @@
               </a:defRPr>
             </a:pPr>
             <a:r>
-              <a:t>STORAGE</a:t>
+              <a:t>IMAGE</a:t>
             </a:r>
           </a:p>
         </p:txBody>
@@ -8643,7 +9286,7 @@
               </a:defRPr>
             </a:pPr>
             <a:r>
-              <a:t>second disk on its own paravirtual controller</a:t>
+              <a:t>provider + catalog scope</a:t>
             </a:r>
           </a:p>
         </p:txBody>
@@ -8688,7 +9331,7 @@
               </a:defRPr>
             </a:pPr>
             <a:r>
-              <a:t>I/O concurrency</a:t>
+              <a:t>artifact ID + version</a:t>
             </a:r>
           </a:p>
         </p:txBody>
@@ -8813,7 +9456,7 @@
               </a:defRPr>
             </a:pPr>
             <a:r>
-              <a:t>MEMORY</a:t>
+              <a:t>INPUTS</a:t>
             </a:r>
           </a:p>
         </p:txBody>
@@ -8858,7 +9501,7 @@
               </a:defRPr>
             </a:pPr>
             <a:r>
-              <a:t>zramswap where pressure justifies it</a:t>
+              <a:t>local launch tfvars</a:t>
             </a:r>
           </a:p>
         </p:txBody>
@@ -8903,7 +9546,7 @@
               </a:defRPr>
             </a:pPr>
             <a:r>
-              <a:t>swap + workload behavior</a:t>
+              <a:t>name / network / size</a:t>
             </a:r>
           </a:p>
         </p:txBody>
@@ -9028,7 +9671,7 @@
               </a:defRPr>
             </a:pPr>
             <a:r>
-              <a:t>OBSERVABILITY</a:t>
+              <a:t>PLAN</a:t>
             </a:r>
           </a:p>
         </p:txBody>
@@ -9073,7 +9716,7 @@
               </a:defRPr>
             </a:pPr>
             <a:r>
-              <a:t>telegraf or node-exporter at provisioning</a:t>
+              <a:t>review before apply</a:t>
             </a:r>
           </a:p>
         </p:txBody>
@@ -9118,7 +9761,7 @@
               </a:defRPr>
             </a:pPr>
             <a:r>
-              <a:t>baseline from first boot</a:t>
+              <a:t>changes + replacements</a:t>
             </a:r>
           </a:p>
         </p:txBody>
@@ -9243,7 +9886,7 @@
               </a:defRPr>
             </a:pPr>
             <a:r>
-              <a:t>PARALLELISM</a:t>
+              <a:t>STATE</a:t>
             </a:r>
           </a:p>
         </p:txBody>
@@ -9288,7 +9931,7 @@
               </a:defRPr>
             </a:pPr>
             <a:r>
-              <a:t>batch deploys; serialize shared image builds</a:t>
+              <a:t>workspace + external backup</a:t>
             </a:r>
           </a:p>
         </p:txBody>
@@ -9333,7 +9976,7 @@
               </a:defRPr>
             </a:pPr>
             <a:r>
-              <a:t>elapsed time + integrity</a:t>
+              <a:t>deployment remains recoverable</a:t>
             </a:r>
           </a:p>
         </p:txBody>
@@ -9421,7 +10064,7 @@
               </a:defRPr>
             </a:pPr>
             <a:r>
-              <a:t>Connect each choice to a measurable result.</a:t>
+              <a:t>Select precisely. Review the plan. Keep state recoverable.</a:t>
             </a:r>
           </a:p>
         </p:txBody>
@@ -9797,7 +10440,7 @@
               <a:spcAft>
                 <a:spcPts val="0"/>
               </a:spcAft>
-              <a:defRPr sz="1800" b="1">
+              <a:defRPr sz="1700" b="1">
                 <a:solidFill>
                   <a:srgbClr val="FFFFFF"/>
                 </a:solidFill>
@@ -9805,7 +10448,7 @@
               </a:defRPr>
             </a:pPr>
             <a:r>
-              <a:t>Multi-distro image portfolio</a:t>
+              <a:t>Seven-release image portfolio</a:t>
             </a:r>
           </a:p>
         </p:txBody>
@@ -9922,7 +10565,7 @@
               <a:spcAft>
                 <a:spcPts val="0"/>
               </a:spcAft>
-              <a:defRPr sz="1800" b="1">
+              <a:defRPr sz="1700" b="1">
                 <a:solidFill>
                   <a:srgbClr val="FFFFFF"/>
                 </a:solidFill>
@@ -9930,7 +10573,7 @@
               </a:defRPr>
             </a:pPr>
             <a:r>
-              <a:t>Four publication targets</a:t>
+              <a:t>Four Terraform provider roots</a:t>
             </a:r>
           </a:p>
         </p:txBody>
@@ -10047,7 +10690,7 @@
               <a:spcAft>
                 <a:spcPts val="0"/>
               </a:spcAft>
-              <a:defRPr sz="1800" b="1">
+              <a:defRPr sz="1700" b="1">
                 <a:solidFill>
                   <a:srgbClr val="FFFFFF"/>
                 </a:solidFill>
@@ -10055,7 +10698,7 @@
               </a:defRPr>
             </a:pPr>
             <a:r>
-              <a:t>Configuration as contract</a:t>
+              <a:t>Catalog-backed image selection</a:t>
             </a:r>
           </a:p>
         </p:txBody>
@@ -10172,7 +10815,7 @@
               <a:spcAft>
                 <a:spcPts val="0"/>
               </a:spcAft>
-              <a:defRPr sz="1800" b="1">
+              <a:defRPr sz="1700" b="1">
                 <a:solidFill>
                   <a:srgbClr val="FFFFFF"/>
                 </a:solidFill>
@@ -10180,7 +10823,7 @@
               </a:defRPr>
             </a:pPr>
             <a:r>
-              <a:t>Image-to-service lifecycle</a:t>
+              <a:t>Reviewable plan-and-apply workflow</a:t>
             </a:r>
           </a:p>
         </p:txBody>
@@ -10297,7 +10940,7 @@
               <a:spcAft>
                 <a:spcPts val="0"/>
               </a:spcAft>
-              <a:defRPr sz="1800" b="1">
+              <a:defRPr sz="1700" b="1">
                 <a:solidFill>
                   <a:srgbClr val="FFFFFF"/>
                 </a:solidFill>
@@ -10305,7 +10948,7 @@
               </a:defRPr>
             </a:pPr>
             <a:r>
-              <a:t>Consistent operator interface</a:t>
+              <a:t>Scoped credentials and state</a:t>
             </a:r>
           </a:p>
         </p:txBody>
@@ -10422,7 +11065,7 @@
               <a:spcAft>
                 <a:spcPts val="0"/>
               </a:spcAft>
-              <a:defRPr sz="1800" b="1">
+              <a:defRPr sz="1700" b="1">
                 <a:solidFill>
                   <a:srgbClr val="FFFFFF"/>
                 </a:solidFill>
@@ -10430,7 +11073,7 @@
               </a:defRPr>
             </a:pPr>
             <a:r>
-              <a:t>Continuous improvement</a:t>
+              <a:t>Repeatable instance deployment</a:t>
             </a:r>
           </a:p>
         </p:txBody>
@@ -10553,7 +11196,7 @@
               </a:defRPr>
             </a:pPr>
             <a:r>
-              <a:t>From image to service with speed, clarity, and confidence.</a:t>
+              <a:t>From reproducible images to reviewable deployments.</a:t>
             </a:r>
           </a:p>
         </p:txBody>
@@ -11544,7 +12187,7 @@
         <p:spPr>
           <a:xfrm>
             <a:off x="6345936" y="1810512"/>
-            <a:ext cx="1965960" cy="292608"/>
+            <a:ext cx="2240280" cy="292608"/>
           </a:xfrm>
           <a:prstGeom prst="roundRect">
             <a:avLst/>
@@ -11587,7 +12230,7 @@
         <p:spPr>
           <a:xfrm>
             <a:off x="6345936" y="1819656"/>
-            <a:ext cx="1965960" cy="256032"/>
+            <a:ext cx="2240280" cy="256032"/>
           </a:xfrm>
           <a:prstGeom prst="rect">
             <a:avLst/>
@@ -11618,7 +12261,7 @@
               </a:defRPr>
             </a:pPr>
             <a:r>
-              <a:t>VM AUTOMATION</a:t>
+              <a:t>TERRAFORM DEPLOYMENT</a:t>
             </a:r>
           </a:p>
         </p:txBody>
@@ -11663,7 +12306,7 @@
               </a:defRPr>
             </a:pPr>
             <a:r>
-              <a:t>Turn the base into a service</a:t>
+              <a:t>Launch from the image catalog</a:t>
             </a:r>
           </a:p>
         </p:txBody>
@@ -11751,7 +12394,7 @@
               </a:defRPr>
             </a:pPr>
             <a:r>
-              <a:t>inventory expresses intent</a:t>
+              <a:t>catalog selects the published image</a:t>
             </a:r>
           </a:p>
         </p:txBody>
@@ -11839,7 +12482,7 @@
               </a:defRPr>
             </a:pPr>
             <a:r>
-              <a:t>roles configure the guest</a:t>
+              <a:t>tfvars define provider launch settings</a:t>
             </a:r>
           </a:p>
         </p:txBody>
@@ -11927,7 +12570,7 @@
               </a:defRPr>
             </a:pPr>
             <a:r>
-              <a:t>wrappers support its lifecycle</a:t>
+              <a:t>plan reviews; apply deploys the VM</a:t>
             </a:r>
           </a:p>
         </p:txBody>
@@ -11972,7 +12615,7 @@
               </a:defRPr>
             </a:pPr>
             <a:r>
-              <a:t>4 publication targets  /  44 roles</a:t>
+              <a:t>4 provider roots  /  4 environments</a:t>
             </a:r>
           </a:p>
         </p:txBody>
@@ -12017,7 +12660,7 @@
               </a:defRPr>
             </a:pPr>
             <a:r>
-              <a:t>ansible-vmware</a:t>
+              <a:t>dib7-deploy</a:t>
             </a:r>
           </a:p>
         </p:txBody>
@@ -13582,7 +14225,7 @@
               </a:defRPr>
             </a:pPr>
             <a:r>
-              <a:t>One image path owns Linux customization.</a:t>
+              <a:t>One image build feeds the catalog.</a:t>
             </a:r>
           </a:p>
           <a:p>
@@ -13604,7 +14247,7 @@
               </a:defRPr>
             </a:pPr>
             <a:r>
-              <a:t>Destination logic stays at the boundary.</a:t>
+              <a:t>Terraform deploys from provider artifacts.</a:t>
             </a:r>
           </a:p>
         </p:txBody>
@@ -13810,7 +14453,7 @@
               </a:defRPr>
             </a:pPr>
             <a:r>
-              <a:t>REQUIREMENTS TO INFRASTRUCTURE</a:t>
+              <a:t>TERRAFORM DEPLOYMENT</a:t>
             </a:r>
           </a:p>
         </p:txBody>
@@ -13855,7 +14498,7 @@
               </a:defRPr>
             </a:pPr>
             <a:r>
-              <a:t>Configuration is the contract</a:t>
+              <a:t>The catalog is the deployment contract</a:t>
             </a:r>
           </a:p>
         </p:txBody>
@@ -13986,7 +14629,7 @@
               </a:defRPr>
             </a:pPr>
             <a:r>
-              <a:t>HOST INTENT</a:t>
+              <a:t>CATALOG FIELDS</a:t>
             </a:r>
           </a:p>
         </p:txBody>
@@ -14042,8 +14685,8 @@
         </p:nvSpPr>
         <p:spPr>
           <a:xfrm>
-            <a:off x="914400" y="2084831"/>
-            <a:ext cx="1600200" cy="274320"/>
+            <a:off x="822960" y="2084831"/>
+            <a:ext cx="1737360" cy="274320"/>
           </a:xfrm>
           <a:prstGeom prst="rect">
             <a:avLst/>
@@ -14066,7 +14709,7 @@
               <a:spcAft>
                 <a:spcPts val="0"/>
               </a:spcAft>
-              <a:defRPr sz="1250" b="0">
+              <a:defRPr sz="950" b="0">
                 <a:solidFill>
                   <a:srgbClr val="8CC9C9"/>
                 </a:solidFill>
@@ -14074,7 +14717,7 @@
               </a:defRPr>
             </a:pPr>
             <a:r>
-              <a:t>os_family:</a:t>
+              <a:t>image_logical_name:</a:t>
             </a:r>
           </a:p>
         </p:txBody>
@@ -14087,8 +14730,8 @@
         </p:nvSpPr>
         <p:spPr>
           <a:xfrm>
-            <a:off x="2514600" y="2084831"/>
-            <a:ext cx="1371600" cy="274320"/>
+            <a:off x="2560320" y="2084831"/>
+            <a:ext cx="1417320" cy="274320"/>
           </a:xfrm>
           <a:prstGeom prst="rect">
             <a:avLst/>
@@ -14111,7 +14754,7 @@
               <a:spcAft>
                 <a:spcPts val="0"/>
               </a:spcAft>
-              <a:defRPr sz="1250" b="0">
+              <a:defRPr sz="950" b="0">
                 <a:solidFill>
                   <a:srgbClr val="FFFFFF"/>
                 </a:solidFill>
@@ -14119,7 +14762,7 @@
               </a:defRPr>
             </a:pPr>
             <a:r>
-              <a:t>Debian</a:t>
+              <a:t>ubuntu26041-base</a:t>
             </a:r>
           </a:p>
         </p:txBody>
@@ -14132,8 +14775,8 @@
         </p:nvSpPr>
         <p:spPr>
           <a:xfrm>
-            <a:off x="914400" y="2286000"/>
-            <a:ext cx="1600200" cy="274320"/>
+            <a:off x="822960" y="2286000"/>
+            <a:ext cx="1737360" cy="274320"/>
           </a:xfrm>
           <a:prstGeom prst="rect">
             <a:avLst/>
@@ -14156,7 +14799,7 @@
               <a:spcAft>
                 <a:spcPts val="0"/>
               </a:spcAft>
-              <a:defRPr sz="1250" b="0">
+              <a:defRPr sz="950" b="0">
                 <a:solidFill>
                   <a:srgbClr val="8CC9C9"/>
                 </a:solidFill>
@@ -14164,7 +14807,7 @@
               </a:defRPr>
             </a:pPr>
             <a:r>
-              <a:t>os_release:</a:t>
+              <a:t>image_artifact_id:</a:t>
             </a:r>
           </a:p>
         </p:txBody>
@@ -14177,8 +14820,8 @@
         </p:nvSpPr>
         <p:spPr>
           <a:xfrm>
-            <a:off x="2514600" y="2286000"/>
-            <a:ext cx="1371600" cy="274320"/>
+            <a:off x="2560320" y="2286000"/>
+            <a:ext cx="1417320" cy="274320"/>
           </a:xfrm>
           <a:prstGeom prst="rect">
             <a:avLst/>
@@ -14201,7 +14844,7 @@
               <a:spcAft>
                 <a:spcPts val="0"/>
               </a:spcAft>
-              <a:defRPr sz="1250" b="0">
+              <a:defRPr sz="950" b="0">
                 <a:solidFill>
                   <a:srgbClr val="FFFFFF"/>
                 </a:solidFill>
@@ -14209,7 +14852,7 @@
               </a:defRPr>
             </a:pPr>
             <a:r>
-              <a:t>24.04.5</a:t>
+              <a:t>provider image ID</a:t>
             </a:r>
           </a:p>
         </p:txBody>
@@ -14222,8 +14865,8 @@
         </p:nvSpPr>
         <p:spPr>
           <a:xfrm>
-            <a:off x="914400" y="2487168"/>
-            <a:ext cx="1600200" cy="274320"/>
+            <a:off x="822960" y="2487168"/>
+            <a:ext cx="1737360" cy="274320"/>
           </a:xfrm>
           <a:prstGeom prst="rect">
             <a:avLst/>
@@ -14246,7 +14889,7 @@
               <a:spcAft>
                 <a:spcPts val="0"/>
               </a:spcAft>
-              <a:defRPr sz="1250" b="0">
+              <a:defRPr sz="950" b="0">
                 <a:solidFill>
                   <a:srgbClr val="8CC9C9"/>
                 </a:solidFill>
@@ -14254,7 +14897,7 @@
               </a:defRPr>
             </a:pPr>
             <a:r>
-              <a:t>vm_num_cpus:</a:t>
+              <a:t>image_version:</a:t>
             </a:r>
           </a:p>
         </p:txBody>
@@ -14267,8 +14910,8 @@
         </p:nvSpPr>
         <p:spPr>
           <a:xfrm>
-            <a:off x="2514600" y="2487168"/>
-            <a:ext cx="1371600" cy="274320"/>
+            <a:off x="2560320" y="2487168"/>
+            <a:ext cx="1417320" cy="274320"/>
           </a:xfrm>
           <a:prstGeom prst="rect">
             <a:avLst/>
@@ -14291,7 +14934,7 @@
               <a:spcAft>
                 <a:spcPts val="0"/>
               </a:spcAft>
-              <a:defRPr sz="1250" b="0">
+              <a:defRPr sz="950" b="0">
                 <a:solidFill>
                   <a:srgbClr val="FFFFFF"/>
                 </a:solidFill>
@@ -14299,7 +14942,7 @@
               </a:defRPr>
             </a:pPr>
             <a:r>
-              <a:t>4</a:t>
+              <a:t>selected run</a:t>
             </a:r>
           </a:p>
         </p:txBody>
@@ -14312,8 +14955,8 @@
         </p:nvSpPr>
         <p:spPr>
           <a:xfrm>
-            <a:off x="914400" y="2688336"/>
-            <a:ext cx="1600200" cy="274320"/>
+            <a:off x="822960" y="2688336"/>
+            <a:ext cx="1737360" cy="274320"/>
           </a:xfrm>
           <a:prstGeom prst="rect">
             <a:avLst/>
@@ -14336,7 +14979,7 @@
               <a:spcAft>
                 <a:spcPts val="0"/>
               </a:spcAft>
-              <a:defRPr sz="1250" b="0">
+              <a:defRPr sz="950" b="0">
                 <a:solidFill>
                   <a:srgbClr val="8CC9C9"/>
                 </a:solidFill>
@@ -14344,7 +14987,7 @@
               </a:defRPr>
             </a:pPr>
             <a:r>
-              <a:t>vm_memory_mb:</a:t>
+              <a:t>image_boot_mode:</a:t>
             </a:r>
           </a:p>
         </p:txBody>
@@ -14357,8 +15000,8 @@
         </p:nvSpPr>
         <p:spPr>
           <a:xfrm>
-            <a:off x="2514600" y="2688336"/>
-            <a:ext cx="1371600" cy="274320"/>
+            <a:off x="2560320" y="2688336"/>
+            <a:ext cx="1417320" cy="274320"/>
           </a:xfrm>
           <a:prstGeom prst="rect">
             <a:avLst/>
@@ -14381,7 +15024,7 @@
               <a:spcAft>
                 <a:spcPts val="0"/>
               </a:spcAft>
-              <a:defRPr sz="1250" b="0">
+              <a:defRPr sz="950" b="0">
                 <a:solidFill>
                   <a:srgbClr val="FFFFFF"/>
                 </a:solidFill>
@@ -14389,7 +15032,7 @@
               </a:defRPr>
             </a:pPr>
             <a:r>
-              <a:t>4096</a:t>
+              <a:t>catalog value</a:t>
             </a:r>
           </a:p>
         </p:txBody>
@@ -14402,8 +15045,8 @@
         </p:nvSpPr>
         <p:spPr>
           <a:xfrm>
-            <a:off x="914400" y="2889503"/>
-            <a:ext cx="1600200" cy="274320"/>
+            <a:off x="822960" y="2889503"/>
+            <a:ext cx="1737360" cy="274320"/>
           </a:xfrm>
           <a:prstGeom prst="rect">
             <a:avLst/>
@@ -14426,7 +15069,7 @@
               <a:spcAft>
                 <a:spcPts val="0"/>
               </a:spcAft>
-              <a:defRPr sz="1250" b="0">
+              <a:defRPr sz="950" b="0">
                 <a:solidFill>
                   <a:srgbClr val="8CC9C9"/>
                 </a:solidFill>
@@ -14434,7 +15077,7 @@
               </a:defRPr>
             </a:pPr>
             <a:r>
-              <a:t>vm_disk1_gb:</a:t>
+              <a:t>image_scope:</a:t>
             </a:r>
           </a:p>
         </p:txBody>
@@ -14447,8 +15090,8 @@
         </p:nvSpPr>
         <p:spPr>
           <a:xfrm>
-            <a:off x="2514600" y="2889503"/>
-            <a:ext cx="1371600" cy="274320"/>
+            <a:off x="2560320" y="2889503"/>
+            <a:ext cx="1417320" cy="274320"/>
           </a:xfrm>
           <a:prstGeom prst="rect">
             <a:avLst/>
@@ -14471,7 +15114,7 @@
               <a:spcAft>
                 <a:spcPts val="0"/>
               </a:spcAft>
-              <a:defRPr sz="1250" b="0">
+              <a:defRPr sz="950" b="0">
                 <a:solidFill>
                   <a:srgbClr val="FFFFFF"/>
                 </a:solidFill>
@@ -14479,7 +15122,7 @@
               </a:defRPr>
             </a:pPr>
             <a:r>
-              <a:t>2000</a:t>
+              <a:t>provider scope</a:t>
             </a:r>
           </a:p>
         </p:txBody>
@@ -14492,8 +15135,8 @@
         </p:nvSpPr>
         <p:spPr>
           <a:xfrm>
-            <a:off x="914400" y="3090672"/>
-            <a:ext cx="1600200" cy="274320"/>
+            <a:off x="822960" y="3090672"/>
+            <a:ext cx="1737360" cy="274320"/>
           </a:xfrm>
           <a:prstGeom prst="rect">
             <a:avLst/>
@@ -14516,7 +15159,7 @@
               <a:spcAft>
                 <a:spcPts val="0"/>
               </a:spcAft>
-              <a:defRPr sz="1250" b="0">
+              <a:defRPr sz="950" b="0">
                 <a:solidFill>
                   <a:srgbClr val="8CC9C9"/>
                 </a:solidFill>
@@ -14524,7 +15167,7 @@
               </a:defRPr>
             </a:pPr>
             <a:r>
-              <a:t>vm_vlan:</a:t>
+              <a:t>instance name:</a:t>
             </a:r>
           </a:p>
         </p:txBody>
@@ -14537,8 +15180,8 @@
         </p:nvSpPr>
         <p:spPr>
           <a:xfrm>
-            <a:off x="2514600" y="3090672"/>
-            <a:ext cx="1371600" cy="274320"/>
+            <a:off x="2560320" y="3090672"/>
+            <a:ext cx="1417320" cy="274320"/>
           </a:xfrm>
           <a:prstGeom prst="rect">
             <a:avLst/>
@@ -14561,7 +15204,7 @@
               <a:spcAft>
                 <a:spcPts val="0"/>
               </a:spcAft>
-              <a:defRPr sz="1250" b="0">
+              <a:defRPr sz="950" b="0">
                 <a:solidFill>
                   <a:srgbClr val="FFFFFF"/>
                 </a:solidFill>
@@ -14569,7 +15212,7 @@
               </a:defRPr>
             </a:pPr>
             <a:r>
-              <a:t>VM Network</a:t>
+              <a:t>local setting</a:t>
             </a:r>
           </a:p>
         </p:txBody>
@@ -14582,8 +15225,8 @@
         </p:nvSpPr>
         <p:spPr>
           <a:xfrm>
-            <a:off x="914400" y="3291839"/>
-            <a:ext cx="1600200" cy="274320"/>
+            <a:off x="822960" y="3291839"/>
+            <a:ext cx="1737360" cy="274320"/>
           </a:xfrm>
           <a:prstGeom prst="rect">
             <a:avLst/>
@@ -14606,7 +15249,7 @@
               <a:spcAft>
                 <a:spcPts val="0"/>
               </a:spcAft>
-              <a:defRPr sz="1250" b="0">
+              <a:defRPr sz="950" b="0">
                 <a:solidFill>
                   <a:srgbClr val="8CC9C9"/>
                 </a:solidFill>
@@ -14614,7 +15257,7 @@
               </a:defRPr>
             </a:pPr>
             <a:r>
-              <a:t>vm_role:</a:t>
+              <a:t>network / size:</a:t>
             </a:r>
           </a:p>
         </p:txBody>
@@ -14627,8 +15270,8 @@
         </p:nvSpPr>
         <p:spPr>
           <a:xfrm>
-            <a:off x="2514600" y="3291839"/>
-            <a:ext cx="1371600" cy="274320"/>
+            <a:off x="2560320" y="3291839"/>
+            <a:ext cx="1417320" cy="274320"/>
           </a:xfrm>
           <a:prstGeom prst="rect">
             <a:avLst/>
@@ -14651,7 +15294,7 @@
               <a:spcAft>
                 <a:spcPts val="0"/>
               </a:spcAft>
-              <a:defRPr sz="1250" b="0">
+              <a:defRPr sz="950" b="0">
                 <a:solidFill>
                   <a:srgbClr val="FFFFFF"/>
                 </a:solidFill>
@@ -14659,7 +15302,7 @@
               </a:defRPr>
             </a:pPr>
             <a:r>
-              <a:t>test-ubuntu</a:t>
+              <a:t>launch settings</a:t>
             </a:r>
           </a:p>
         </p:txBody>
@@ -14672,8 +15315,8 @@
         </p:nvSpPr>
         <p:spPr>
           <a:xfrm>
-            <a:off x="914400" y="3493008"/>
-            <a:ext cx="1600200" cy="274320"/>
+            <a:off x="822960" y="3493008"/>
+            <a:ext cx="1737360" cy="274320"/>
           </a:xfrm>
           <a:prstGeom prst="rect">
             <a:avLst/>
@@ -14696,7 +15339,7 @@
               <a:spcAft>
                 <a:spcPts val="0"/>
               </a:spcAft>
-              <a:defRPr sz="1250" b="0">
+              <a:defRPr sz="950" b="0">
                 <a:solidFill>
                   <a:srgbClr val="8CC9C9"/>
                 </a:solidFill>
@@ -14704,7 +15347,7 @@
               </a:defRPr>
             </a:pPr>
             <a:r>
-              <a:t>vm_env:</a:t>
+              <a:t>workspace:</a:t>
             </a:r>
           </a:p>
         </p:txBody>
@@ -14717,8 +15360,8 @@
         </p:nvSpPr>
         <p:spPr>
           <a:xfrm>
-            <a:off x="2514600" y="3493008"/>
-            <a:ext cx="1371600" cy="274320"/>
+            <a:off x="2560320" y="3493008"/>
+            <a:ext cx="1417320" cy="274320"/>
           </a:xfrm>
           <a:prstGeom prst="rect">
             <a:avLst/>
@@ -14741,7 +15384,7 @@
               <a:spcAft>
                 <a:spcPts val="0"/>
               </a:spcAft>
-              <a:defRPr sz="1250" b="0">
+              <a:defRPr sz="950" b="0">
                 <a:solidFill>
                   <a:srgbClr val="FFFFFF"/>
                 </a:solidFill>
@@ -14749,7 +15392,7 @@
               </a:defRPr>
             </a:pPr>
             <a:r>
-              <a:t>prod</a:t>
+              <a:t>deployment state</a:t>
             </a:r>
           </a:p>
         </p:txBody>
@@ -14786,7 +15429,7 @@
               <a:spcAft>
                 <a:spcPts val="0"/>
               </a:spcAft>
-              <a:defRPr sz="900" b="1">
+              <a:defRPr sz="850" b="1">
                 <a:solidFill>
                   <a:srgbClr val="AFC4C6"/>
                 </a:solidFill>
@@ -14794,7 +15437,7 @@
               </a:defRPr>
             </a:pPr>
             <a:r>
-              <a:t>reviewable  /  versioned  /  explicit</a:t>
+              <a:t>catalog image + local launch settings</a:t>
             </a:r>
           </a:p>
         </p:txBody>
@@ -14851,7 +15494,7 @@
         <p:spPr>
           <a:xfrm>
             <a:off x="5166360" y="1444752"/>
-            <a:ext cx="1143000" cy="292608"/>
+            <a:ext cx="1600200" cy="292608"/>
           </a:xfrm>
           <a:prstGeom prst="roundRect">
             <a:avLst/>
@@ -14894,7 +15537,7 @@
         <p:spPr>
           <a:xfrm>
             <a:off x="5166360" y="1453896"/>
-            <a:ext cx="1143000" cy="256032"/>
+            <a:ext cx="1600200" cy="256032"/>
           </a:xfrm>
           <a:prstGeom prst="rect">
             <a:avLst/>
@@ -14925,7 +15568,7 @@
               </a:defRPr>
             </a:pPr>
             <a:r>
-              <a:t>ROLES</a:t>
+              <a:t>PROVIDER ROOTS</a:t>
             </a:r>
           </a:p>
         </p:txBody>
@@ -15005,15 +15648,15 @@
               <a:spcAft>
                 <a:spcPts val="0"/>
               </a:spcAft>
-              <a:defRPr sz="1050" b="1">
+              <a:defRPr sz="1000" b="1">
                 <a:solidFill>
                   <a:srgbClr val="07595C"/>
                 </a:solidFill>
-                <a:latin typeface="DejaVu Sans Mono"/>
-              </a:defRPr>
-            </a:pPr>
-            <a:r>
-              <a:t>deploy-ova</a:t>
+                <a:latin typeface="Noto Sans"/>
+              </a:defRPr>
+            </a:pPr>
+            <a:r>
+              <a:t>AWS</a:t>
             </a:r>
           </a:p>
         </p:txBody>
@@ -15093,15 +15736,15 @@
               <a:spcAft>
                 <a:spcPts val="0"/>
               </a:spcAft>
-              <a:defRPr sz="1050" b="1">
+              <a:defRPr sz="1000" b="1">
                 <a:solidFill>
                   <a:srgbClr val="07595C"/>
                 </a:solidFill>
-                <a:latin typeface="DejaVu Sans Mono"/>
-              </a:defRPr>
-            </a:pPr>
-            <a:r>
-              <a:t>networks</a:t>
+                <a:latin typeface="Noto Sans"/>
+              </a:defRPr>
+            </a:pPr>
+            <a:r>
+              <a:t>Google Cloud</a:t>
             </a:r>
           </a:p>
         </p:txBody>
@@ -15181,15 +15824,15 @@
               <a:spcAft>
                 <a:spcPts val="0"/>
               </a:spcAft>
-              <a:defRPr sz="1050" b="1">
+              <a:defRPr sz="1000" b="1">
                 <a:solidFill>
                   <a:srgbClr val="07595C"/>
                 </a:solidFill>
-                <a:latin typeface="DejaVu Sans Mono"/>
-              </a:defRPr>
-            </a:pPr>
-            <a:r>
-              <a:t>lvol</a:t>
+                <a:latin typeface="Noto Sans"/>
+              </a:defRPr>
+            </a:pPr>
+            <a:r>
+              <a:t>OpenStack</a:t>
             </a:r>
           </a:p>
         </p:txBody>
@@ -15269,243 +15912,67 @@
               <a:spcAft>
                 <a:spcPts val="0"/>
               </a:spcAft>
+              <a:defRPr sz="1000" b="1">
+                <a:solidFill>
+                  <a:srgbClr val="07595C"/>
+                </a:solidFill>
+                <a:latin typeface="Noto Sans"/>
+              </a:defRPr>
+            </a:pPr>
+            <a:r>
+              <a:t>vSphere</a:t>
+            </a:r>
+          </a:p>
+        </p:txBody>
+      </p:sp>
+      <p:sp>
+        <p:nvSpPr>
+          <p:cNvPr id="37" name="TextBox 36"/>
+          <p:cNvSpPr txBox="1"/>
+          <p:nvPr/>
+        </p:nvSpPr>
+        <p:spPr>
+          <a:xfrm>
+            <a:off x="5166360" y="4041648"/>
+            <a:ext cx="2743200" cy="457200"/>
+          </a:xfrm>
+          <a:prstGeom prst="rect">
+            <a:avLst/>
+          </a:prstGeom>
+          <a:noFill/>
+        </p:spPr>
+        <p:txBody>
+          <a:bodyPr wrap="square" lIns="18288" rIns="18288" tIns="18288" bIns="18288" anchor="t">
+            <a:spAutoFit/>
+          </a:bodyPr>
+          <a:lstStyle/>
+          <a:p>
+            <a:pPr algn="l">
+              <a:lnSpc>
+                <a:spcPct val="105000"/>
+              </a:lnSpc>
+              <a:spcBef>
+                <a:spcPts val="0"/>
+              </a:spcBef>
+              <a:spcAft>
+                <a:spcPts val="0"/>
+              </a:spcAft>
               <a:defRPr sz="1050" b="1">
                 <a:solidFill>
-                  <a:srgbClr val="07595C"/>
-                </a:solidFill>
-                <a:latin typeface="DejaVu Sans Mono"/>
-              </a:defRPr>
-            </a:pPr>
-            <a:r>
-              <a:t>default-users</a:t>
-            </a:r>
-          </a:p>
-        </p:txBody>
-      </p:sp>
-      <p:sp>
-        <p:nvSpPr>
-          <p:cNvPr id="37" name="Rounded Rectangle 36"/>
-          <p:cNvSpPr/>
-          <p:nvPr/>
-        </p:nvSpPr>
-        <p:spPr>
-          <a:xfrm>
-            <a:off x="5166360" y="3785616"/>
-            <a:ext cx="1298448" cy="658368"/>
-          </a:xfrm>
-          <a:prstGeom prst="roundRect">
-            <a:avLst/>
-          </a:prstGeom>
-          <a:solidFill>
-            <a:srgbClr val="DDEDEC"/>
-          </a:solidFill>
-          <a:ln>
-            <a:noFill/>
-          </a:ln>
-        </p:spPr>
-        <p:style>
-          <a:lnRef idx="1">
-            <a:schemeClr val="accent1"/>
-          </a:lnRef>
-          <a:fillRef idx="3">
-            <a:schemeClr val="accent1"/>
-          </a:fillRef>
-          <a:effectRef idx="2">
-            <a:schemeClr val="accent1"/>
-          </a:effectRef>
-          <a:fontRef idx="minor">
-            <a:schemeClr val="lt1"/>
-          </a:fontRef>
-        </p:style>
-        <p:txBody>
-          <a:bodyPr rtlCol="0" anchor="ctr"/>
-          <a:lstStyle/>
-          <a:p>
-            <a:pPr algn="ctr"/>
-          </a:p>
-        </p:txBody>
-      </p:sp>
-      <p:sp>
-        <p:nvSpPr>
-          <p:cNvPr id="38" name="TextBox 37"/>
-          <p:cNvSpPr txBox="1"/>
-          <p:nvPr/>
-        </p:nvSpPr>
-        <p:spPr>
-          <a:xfrm>
-            <a:off x="5166360" y="3986784"/>
-            <a:ext cx="1298448" cy="256032"/>
-          </a:xfrm>
-          <a:prstGeom prst="rect">
-            <a:avLst/>
-          </a:prstGeom>
-          <a:noFill/>
-        </p:spPr>
-        <p:txBody>
-          <a:bodyPr wrap="square" lIns="18288" rIns="18288" tIns="18288" bIns="18288" anchor="t">
-            <a:spAutoFit/>
-          </a:bodyPr>
-          <a:lstStyle/>
-          <a:p>
-            <a:pPr algn="ctr">
-              <a:lnSpc>
-                <a:spcPct val="105000"/>
-              </a:lnSpc>
-              <a:spcBef>
-                <a:spcPts val="0"/>
-              </a:spcBef>
-              <a:spcAft>
-                <a:spcPts val="0"/>
-              </a:spcAft>
-              <a:defRPr sz="1050" b="1">
-                <a:solidFill>
-                  <a:srgbClr val="07595C"/>
-                </a:solidFill>
-                <a:latin typeface="DejaVu Sans Mono"/>
-              </a:defRPr>
-            </a:pPr>
-            <a:r>
-              <a:t>ufw</a:t>
-            </a:r>
-          </a:p>
-        </p:txBody>
-      </p:sp>
-      <p:sp>
-        <p:nvSpPr>
-          <p:cNvPr id="39" name="Rounded Rectangle 38"/>
-          <p:cNvSpPr/>
-          <p:nvPr/>
-        </p:nvSpPr>
-        <p:spPr>
-          <a:xfrm>
-            <a:off x="6583680" y="3785616"/>
-            <a:ext cx="1298448" cy="658368"/>
-          </a:xfrm>
-          <a:prstGeom prst="roundRect">
-            <a:avLst/>
-          </a:prstGeom>
-          <a:solidFill>
-            <a:srgbClr val="DDEDEC"/>
-          </a:solidFill>
-          <a:ln>
-            <a:noFill/>
-          </a:ln>
-        </p:spPr>
-        <p:style>
-          <a:lnRef idx="1">
-            <a:schemeClr val="accent1"/>
-          </a:lnRef>
-          <a:fillRef idx="3">
-            <a:schemeClr val="accent1"/>
-          </a:fillRef>
-          <a:effectRef idx="2">
-            <a:schemeClr val="accent1"/>
-          </a:effectRef>
-          <a:fontRef idx="minor">
-            <a:schemeClr val="lt1"/>
-          </a:fontRef>
-        </p:style>
-        <p:txBody>
-          <a:bodyPr rtlCol="0" anchor="ctr"/>
-          <a:lstStyle/>
-          <a:p>
-            <a:pPr algn="ctr"/>
-          </a:p>
-        </p:txBody>
-      </p:sp>
-      <p:sp>
-        <p:nvSpPr>
-          <p:cNvPr id="40" name="TextBox 39"/>
-          <p:cNvSpPr txBox="1"/>
-          <p:nvPr/>
-        </p:nvSpPr>
-        <p:spPr>
-          <a:xfrm>
-            <a:off x="6583680" y="3986784"/>
-            <a:ext cx="1298448" cy="256032"/>
-          </a:xfrm>
-          <a:prstGeom prst="rect">
-            <a:avLst/>
-          </a:prstGeom>
-          <a:noFill/>
-        </p:spPr>
-        <p:txBody>
-          <a:bodyPr wrap="square" lIns="18288" rIns="18288" tIns="18288" bIns="18288" anchor="t">
-            <a:spAutoFit/>
-          </a:bodyPr>
-          <a:lstStyle/>
-          <a:p>
-            <a:pPr algn="ctr">
-              <a:lnSpc>
-                <a:spcPct val="105000"/>
-              </a:lnSpc>
-              <a:spcBef>
-                <a:spcPts val="0"/>
-              </a:spcBef>
-              <a:spcAft>
-                <a:spcPts val="0"/>
-              </a:spcAft>
-              <a:defRPr sz="1050" b="1">
-                <a:solidFill>
-                  <a:srgbClr val="07595C"/>
-                </a:solidFill>
-                <a:latin typeface="DejaVu Sans Mono"/>
-              </a:defRPr>
-            </a:pPr>
-            <a:r>
-              <a:t>telegraf</a:t>
-            </a:r>
-          </a:p>
-        </p:txBody>
-      </p:sp>
-      <p:sp>
-        <p:nvSpPr>
-          <p:cNvPr id="41" name="TextBox 40"/>
-          <p:cNvSpPr txBox="1"/>
-          <p:nvPr/>
-        </p:nvSpPr>
-        <p:spPr>
-          <a:xfrm>
-            <a:off x="5166360" y="4754880"/>
-            <a:ext cx="2743200" cy="457200"/>
-          </a:xfrm>
-          <a:prstGeom prst="rect">
-            <a:avLst/>
-          </a:prstGeom>
-          <a:noFill/>
-        </p:spPr>
-        <p:txBody>
-          <a:bodyPr wrap="square" lIns="18288" rIns="18288" tIns="18288" bIns="18288" anchor="t">
-            <a:spAutoFit/>
-          </a:bodyPr>
-          <a:lstStyle/>
-          <a:p>
-            <a:pPr algn="l">
-              <a:lnSpc>
-                <a:spcPct val="105000"/>
-              </a:lnSpc>
-              <a:spcBef>
-                <a:spcPts val="0"/>
-              </a:spcBef>
-              <a:spcAft>
-                <a:spcPts val="0"/>
-              </a:spcAft>
-              <a:defRPr sz="1050" b="1">
-                <a:solidFill>
                   <a:srgbClr val="5C6A70"/>
                 </a:solidFill>
                 <a:latin typeface="Noto Sans"/>
               </a:defRPr>
             </a:pPr>
             <a:r>
-              <a:t>44 roles, one per concern</a:t>
-            </a:r>
-          </a:p>
-        </p:txBody>
-      </p:sp>
-      <p:sp>
-        <p:nvSpPr>
-          <p:cNvPr id="42" name="Chevron 41"/>
+              <a:t>4 provider roots</a:t>
+            </a:r>
+          </a:p>
+        </p:txBody>
+      </p:sp>
+      <p:sp>
+        <p:nvSpPr>
+          <p:cNvPr id="38" name="Chevron 37"/>
           <p:cNvSpPr/>
           <p:nvPr/>
         </p:nvSpPr>
@@ -15548,7 +16015,7 @@
       </p:sp>
       <p:sp>
         <p:nvSpPr>
-          <p:cNvPr id="43" name="Rounded Rectangle 42"/>
+          <p:cNvPr id="39" name="Rounded Rectangle 38"/>
           <p:cNvSpPr/>
           <p:nvPr/>
         </p:nvSpPr>
@@ -15591,7 +16058,7 @@
       </p:sp>
       <p:sp>
         <p:nvSpPr>
-          <p:cNvPr id="44" name="TextBox 43"/>
+          <p:cNvPr id="40" name="TextBox 39"/>
           <p:cNvSpPr txBox="1"/>
           <p:nvPr/>
         </p:nvSpPr>
@@ -15629,14 +16096,14 @@
               </a:defRPr>
             </a:pPr>
             <a:r>
-              <a:t>RESULT</a:t>
-            </a:r>
-          </a:p>
-        </p:txBody>
-      </p:sp>
-      <p:sp>
-        <p:nvSpPr>
-          <p:cNvPr id="45" name="Rounded Rectangle 44"/>
+              <a:t>DEPLOYMENT</a:t>
+            </a:r>
+          </a:p>
+        </p:txBody>
+      </p:sp>
+      <p:sp>
+        <p:nvSpPr>
+          <p:cNvPr id="41" name="Rounded Rectangle 40"/>
           <p:cNvSpPr/>
           <p:nvPr/>
         </p:nvSpPr>
@@ -15681,7 +16148,7 @@
       </p:sp>
       <p:sp>
         <p:nvSpPr>
-          <p:cNvPr id="46" name="TextBox 45"/>
+          <p:cNvPr id="42" name="TextBox 41"/>
           <p:cNvSpPr txBox="1"/>
           <p:nvPr/>
         </p:nvSpPr>
@@ -15719,14 +16186,14 @@
               </a:defRPr>
             </a:pPr>
             <a:r>
-              <a:t>Known state</a:t>
-            </a:r>
-          </a:p>
-        </p:txBody>
-      </p:sp>
-      <p:sp>
-        <p:nvSpPr>
-          <p:cNvPr id="47" name="TextBox 46"/>
+              <a:t>Plan</a:t>
+            </a:r>
+          </a:p>
+        </p:txBody>
+      </p:sp>
+      <p:sp>
+        <p:nvSpPr>
+          <p:cNvPr id="43" name="TextBox 42"/>
           <p:cNvSpPr txBox="1"/>
           <p:nvPr/>
         </p:nvSpPr>
@@ -15764,14 +16231,14 @@
               </a:defRPr>
             </a:pPr>
             <a:r>
-              <a:t>hardware + OS</a:t>
-            </a:r>
-          </a:p>
-        </p:txBody>
-      </p:sp>
-      <p:sp>
-        <p:nvSpPr>
-          <p:cNvPr id="48" name="Rounded Rectangle 47"/>
+              <a:t>review changes</a:t>
+            </a:r>
+          </a:p>
+        </p:txBody>
+      </p:sp>
+      <p:sp>
+        <p:nvSpPr>
+          <p:cNvPr id="44" name="Rounded Rectangle 43"/>
           <p:cNvSpPr/>
           <p:nvPr/>
         </p:nvSpPr>
@@ -15816,7 +16283,7 @@
       </p:sp>
       <p:sp>
         <p:nvSpPr>
-          <p:cNvPr id="49" name="TextBox 48"/>
+          <p:cNvPr id="45" name="TextBox 44"/>
           <p:cNvSpPr txBox="1"/>
           <p:nvPr/>
         </p:nvSpPr>
@@ -15854,14 +16321,14 @@
               </a:defRPr>
             </a:pPr>
             <a:r>
-              <a:t>Controlled access</a:t>
-            </a:r>
-          </a:p>
-        </p:txBody>
-      </p:sp>
-      <p:sp>
-        <p:nvSpPr>
-          <p:cNvPr id="50" name="TextBox 49"/>
+              <a:t>Apply</a:t>
+            </a:r>
+          </a:p>
+        </p:txBody>
+      </p:sp>
+      <p:sp>
+        <p:nvSpPr>
+          <p:cNvPr id="46" name="TextBox 45"/>
           <p:cNvSpPr txBox="1"/>
           <p:nvPr/>
         </p:nvSpPr>
@@ -15899,14 +16366,14 @@
               </a:defRPr>
             </a:pPr>
             <a:r>
-              <a:t>keys + policy</a:t>
-            </a:r>
-          </a:p>
-        </p:txBody>
-      </p:sp>
-      <p:sp>
-        <p:nvSpPr>
-          <p:cNvPr id="51" name="Rounded Rectangle 50"/>
+              <a:t>create instance</a:t>
+            </a:r>
+          </a:p>
+        </p:txBody>
+      </p:sp>
+      <p:sp>
+        <p:nvSpPr>
+          <p:cNvPr id="47" name="Rounded Rectangle 46"/>
           <p:cNvSpPr/>
           <p:nvPr/>
         </p:nvSpPr>
@@ -15951,7 +16418,7 @@
       </p:sp>
       <p:sp>
         <p:nvSpPr>
-          <p:cNvPr id="52" name="TextBox 51"/>
+          <p:cNvPr id="48" name="TextBox 47"/>
           <p:cNvSpPr txBox="1"/>
           <p:nvPr/>
         </p:nvSpPr>
@@ -15989,14 +16456,14 @@
               </a:defRPr>
             </a:pPr>
             <a:r>
-              <a:t>Operable service</a:t>
-            </a:r>
-          </a:p>
-        </p:txBody>
-      </p:sp>
-      <p:sp>
-        <p:nvSpPr>
-          <p:cNvPr id="53" name="TextBox 52"/>
+              <a:t>State</a:t>
+            </a:r>
+          </a:p>
+        </p:txBody>
+      </p:sp>
+      <p:sp>
+        <p:nvSpPr>
+          <p:cNvPr id="49" name="TextBox 48"/>
           <p:cNvSpPr txBox="1"/>
           <p:nvPr/>
         </p:nvSpPr>
@@ -16034,14 +16501,14 @@
               </a:defRPr>
             </a:pPr>
             <a:r>
-              <a:t>metrics + lifecycle</a:t>
-            </a:r>
-          </a:p>
-        </p:txBody>
-      </p:sp>
-      <p:sp>
-        <p:nvSpPr>
-          <p:cNvPr id="54" name="TextBox 53"/>
+              <a:t>track resources</a:t>
+            </a:r>
+          </a:p>
+        </p:txBody>
+      </p:sp>
+      <p:sp>
+        <p:nvSpPr>
+          <p:cNvPr id="50" name="TextBox 49"/>
           <p:cNvSpPr txBox="1"/>
           <p:nvPr/>
         </p:nvSpPr>
@@ -16071,7 +16538,7 @@
               <a:spcAft>
                 <a:spcPts val="0"/>
               </a:spcAft>
-              <a:defRPr sz="1500" b="1">
+              <a:defRPr sz="1400" b="1">
                 <a:solidFill>
                   <a:srgbClr val="3978A8"/>
                 </a:solidFill>
@@ -16079,7 +16546,7 @@
               </a:defRPr>
             </a:pPr>
             <a:r>
-              <a:t>Change the model,</a:t>
+              <a:t>Provider roots share</a:t>
             </a:r>
           </a:p>
           <a:p>
@@ -16093,7 +16560,7 @@
               <a:spcAft>
                 <a:spcPts val="0"/>
               </a:spcAft>
-              <a:defRPr sz="1500" b="1">
+              <a:defRPr sz="1400" b="1">
                 <a:solidFill>
                   <a:srgbClr val="3978A8"/>
                 </a:solidFill>
@@ -16101,14 +16568,14 @@
               </a:defRPr>
             </a:pPr>
             <a:r>
-              <a:t>then validate the machine.</a:t>
-            </a:r>
-          </a:p>
-        </p:txBody>
-      </p:sp>
-      <p:sp>
-        <p:nvSpPr>
-          <p:cNvPr id="55" name="TextBox 54"/>
+              <a:t>catalog-backed image fields.</a:t>
+            </a:r>
+          </a:p>
+        </p:txBody>
+      </p:sp>
+      <p:sp>
+        <p:nvSpPr>
+          <p:cNvPr id="51" name="TextBox 50"/>
           <p:cNvSpPr txBox="1"/>
           <p:nvPr/>
         </p:nvSpPr>
@@ -16153,7 +16620,7 @@
       </p:sp>
       <p:sp>
         <p:nvSpPr>
-          <p:cNvPr id="56" name="TextBox 55"/>
+          <p:cNvPr id="52" name="TextBox 51"/>
           <p:cNvSpPr txBox="1"/>
           <p:nvPr/>
         </p:nvSpPr>
@@ -22069,7 +22536,7 @@
               </a:defRPr>
             </a:pPr>
             <a:r>
-              <a:t>CONFIDENCE AT SCALE</a:t>
+              <a:t>DEPLOYMENT CONTROLS</a:t>
             </a:r>
           </a:p>
         </p:txBody>
@@ -22114,7 +22581,7 @@
               </a:defRPr>
             </a:pPr>
             <a:r>
-              <a:t>Controls that enable automation</a:t>
+              <a:t>Controls for repeatable Terraform deploys</a:t>
             </a:r>
           </a:p>
         </p:txBody>
@@ -22245,7 +22712,7 @@
               </a:defRPr>
             </a:pPr>
             <a:r>
-              <a:t>CREDENTIALS</a:t>
+              <a:t>IMAGE</a:t>
             </a:r>
           </a:p>
         </p:txBody>
@@ -22290,7 +22757,7 @@
               </a:defRPr>
             </a:pPr>
             <a:r>
-              <a:t>Ansible Vault</a:t>
+              <a:t>Catalog-derived tfvars</a:t>
             </a:r>
           </a:p>
         </p:txBody>
@@ -22335,7 +22802,7 @@
               </a:defRPr>
             </a:pPr>
             <a:r>
-              <a:t>One vault per platform: vSphere, AWS, GCP, OpenStack. Playbooks never see a plaintext secret.</a:t>
+              <a:t>Select provider image, version, and scope; review the chosen artifact ID before planning.</a:t>
             </a:r>
           </a:p>
         </p:txBody>
@@ -22423,7 +22890,7 @@
               </a:defRPr>
             </a:pPr>
             <a:r>
-              <a:t>ACCESS</a:t>
+              <a:t>LAUNCH SETTINGS</a:t>
             </a:r>
           </a:p>
         </p:txBody>
@@ -22468,7 +22935,7 @@
               </a:defRPr>
             </a:pPr>
             <a:r>
-              <a:t>Managed SSH keys</a:t>
+              <a:t>Local tfvars</a:t>
             </a:r>
           </a:p>
         </p:txBody>
@@ -22513,7 +22980,7 @@
               </a:defRPr>
             </a:pPr>
             <a:r>
-              <a:t>An authorized_keys role puts the same lab and prod keys on every deployed guest.</a:t>
+              <a:t>Keep network, compute size, and instance name separate from published image metadata.</a:t>
             </a:r>
           </a:p>
         </p:txBody>
@@ -22601,7 +23068,7 @@
               </a:defRPr>
             </a:pPr>
             <a:r>
-              <a:t>NETWORK</a:t>
+              <a:t>CREDENTIALS</a:t>
             </a:r>
           </a:p>
         </p:txBody>
@@ -22646,7 +23113,7 @@
               </a:defRPr>
             </a:pPr>
             <a:r>
-              <a:t>Declarative firewall</a:t>
+              <a:t>HashiCorp Vault</a:t>
             </a:r>
           </a:p>
         </p:txBody>
@@ -22691,7 +23158,7 @@
               </a:defRPr>
             </a:pPr>
             <a:r>
-              <a:t>A ufw role applies policy from host intent, so the rules travel with the machine.</a:t>
+              <a:t>Provider runners fetch credentials at runtime; secrets stay out of launch tfvars.</a:t>
             </a:r>
           </a:p>
         </p:txBody>
@@ -22779,7 +23246,7 @@
               </a:defRPr>
             </a:pPr>
             <a:r>
-              <a:t>SUPPLY CHAIN</a:t>
+              <a:t>STATE</a:t>
             </a:r>
           </a:p>
         </p:txBody>
@@ -22824,7 +23291,7 @@
               </a:defRPr>
             </a:pPr>
             <a:r>
-              <a:t>Pinned + traceable</a:t>
+              <a:t>Workspace + backup</a:t>
             </a:r>
           </a:p>
         </p:txBody>
@@ -22869,7 +23336,7 @@
               </a:defRPr>
             </a:pPr>
             <a:r>
-              <a:t>requirements.txt and requirements.yml pin every dependency; stamps identify every output.</a:t>
+              <a:t>State tracks each deployment. Back up state outside the repository.</a:t>
             </a:r>
           </a:p>
         </p:txBody>
@@ -22914,7 +23381,7 @@
               </a:defRPr>
             </a:pPr>
             <a:r>
-              <a:t>Visible controls let the platform automate more with confidence.</a:t>
+              <a:t>Plan first. Review the changes, then apply.</a:t>
             </a:r>
           </a:p>
         </p:txBody>
@@ -23120,7 +23587,7 @@
               </a:defRPr>
             </a:pPr>
             <a:r>
-              <a:t>VSPHERE LIFECYCLE</a:t>
+              <a:t>TERRAFORM WORKFLOW</a:t>
             </a:r>
           </a:p>
         </p:txBody>
@@ -23165,7 +23632,7 @@
               </a:defRPr>
             </a:pPr>
             <a:r>
-              <a:t>From artifact to operating VM</a:t>
+              <a:t>From catalog image to deployed instance</a:t>
             </a:r>
           </a:p>
         </p:txBody>
@@ -23296,7 +23763,7 @@
               </a:defRPr>
             </a:pPr>
             <a:r>
-              <a:t>SOURCE</a:t>
+              <a:t>SELECT</a:t>
             </a:r>
           </a:p>
         </p:txBody>
@@ -23333,7 +23800,7 @@
               <a:spcAft>
                 <a:spcPts val="0"/>
               </a:spcAft>
-              <a:defRPr sz="1700" b="1">
+              <a:defRPr sz="1600" b="1">
                 <a:solidFill>
                   <a:srgbClr val="17242A"/>
                 </a:solidFill>
@@ -23341,7 +23808,7 @@
               </a:defRPr>
             </a:pPr>
             <a:r>
-              <a:t>library OVA</a:t>
+              <a:t>catalog image</a:t>
             </a:r>
           </a:p>
           <a:p>
@@ -23355,7 +23822,7 @@
               <a:spcAft>
                 <a:spcPts val="0"/>
               </a:spcAft>
-              <a:defRPr sz="1700" b="1">
+              <a:defRPr sz="1600" b="1">
                 <a:solidFill>
                   <a:srgbClr val="17242A"/>
                 </a:solidFill>
@@ -23363,7 +23830,7 @@
               </a:defRPr>
             </a:pPr>
             <a:r>
-              <a:t>or template</a:t>
+              <a:t>+ provider scope</a:t>
             </a:r>
           </a:p>
         </p:txBody>
@@ -23494,7 +23961,7 @@
               </a:defRPr>
             </a:pPr>
             <a:r>
-              <a:t>DEPLOY</a:t>
+              <a:t>CONFIGURE</a:t>
             </a:r>
           </a:p>
         </p:txBody>
@@ -23531,7 +23998,7 @@
               <a:spcAft>
                 <a:spcPts val="0"/>
               </a:spcAft>
-              <a:defRPr sz="1700" b="1">
+              <a:defRPr sz="1600" b="1">
                 <a:solidFill>
                   <a:srgbClr val="17242A"/>
                 </a:solidFill>
@@ -23539,7 +24006,7 @@
               </a:defRPr>
             </a:pPr>
             <a:r>
-              <a:t>vSphere</a:t>
+              <a:t>provider launch</a:t>
             </a:r>
           </a:p>
           <a:p>
@@ -23553,7 +24020,7 @@
               <a:spcAft>
                 <a:spcPts val="0"/>
               </a:spcAft>
-              <a:defRPr sz="1700" b="1">
+              <a:defRPr sz="1600" b="1">
                 <a:solidFill>
                   <a:srgbClr val="17242A"/>
                 </a:solidFill>
@@ -23561,7 +24028,7 @@
               </a:defRPr>
             </a:pPr>
             <a:r>
-              <a:t>placement</a:t>
+              <a:t>settings</a:t>
             </a:r>
           </a:p>
         </p:txBody>
@@ -23692,7 +24159,7 @@
               </a:defRPr>
             </a:pPr>
             <a:r>
-              <a:t>BOOTSTRAP</a:t>
+              <a:t>PLAN</a:t>
             </a:r>
           </a:p>
         </p:txBody>
@@ -23729,7 +24196,7 @@
               <a:spcAft>
                 <a:spcPts val="0"/>
               </a:spcAft>
-              <a:defRPr sz="1700" b="1">
+              <a:defRPr sz="1600" b="1">
                 <a:solidFill>
                   <a:srgbClr val="17242A"/>
                 </a:solidFill>
@@ -23737,7 +24204,7 @@
               </a:defRPr>
             </a:pPr>
             <a:r>
-              <a:t>vApp +</a:t>
+              <a:t>review proposed</a:t>
             </a:r>
           </a:p>
           <a:p>
@@ -23751,7 +24218,7 @@
               <a:spcAft>
                 <a:spcPts val="0"/>
               </a:spcAft>
-              <a:defRPr sz="1700" b="1">
+              <a:defRPr sz="1600" b="1">
                 <a:solidFill>
                   <a:srgbClr val="17242A"/>
                 </a:solidFill>
@@ -23759,7 +24226,7 @@
               </a:defRPr>
             </a:pPr>
             <a:r>
-              <a:t>cloud-init</a:t>
+              <a:t>resource changes</a:t>
             </a:r>
           </a:p>
         </p:txBody>
@@ -23890,7 +24357,7 @@
               </a:defRPr>
             </a:pPr>
             <a:r>
-              <a:t>CONFIGURE</a:t>
+              <a:t>APPLY</a:t>
             </a:r>
           </a:p>
         </p:txBody>
@@ -23927,7 +24394,7 @@
               <a:spcAft>
                 <a:spcPts val="0"/>
               </a:spcAft>
-              <a:defRPr sz="1700" b="1">
+              <a:defRPr sz="1600" b="1">
                 <a:solidFill>
                   <a:srgbClr val="17242A"/>
                 </a:solidFill>
@@ -23935,7 +24402,7 @@
               </a:defRPr>
             </a:pPr>
             <a:r>
-              <a:t>family +</a:t>
+              <a:t>create instance</a:t>
             </a:r>
           </a:p>
           <a:p>
@@ -23949,7 +24416,7 @@
               <a:spcAft>
                 <a:spcPts val="0"/>
               </a:spcAft>
-              <a:defRPr sz="1700" b="1">
+              <a:defRPr sz="1600" b="1">
                 <a:solidFill>
                   <a:srgbClr val="17242A"/>
                 </a:solidFill>
@@ -23957,7 +24424,7 @@
               </a:defRPr>
             </a:pPr>
             <a:r>
-              <a:t>workload roles</a:t>
+              <a:t>from published image</a:t>
             </a:r>
           </a:p>
         </p:txBody>
@@ -23971,7 +24438,7 @@
         <p:spPr>
           <a:xfrm>
             <a:off x="658368" y="3822191"/>
-            <a:ext cx="1755648" cy="292608"/>
+            <a:ext cx="1965960" cy="292608"/>
           </a:xfrm>
           <a:prstGeom prst="roundRect">
             <a:avLst/>
@@ -24014,7 +24481,7 @@
         <p:spPr>
           <a:xfrm>
             <a:off x="658368" y="3831335"/>
-            <a:ext cx="1755648" cy="256032"/>
+            <a:ext cx="1965960" cy="256032"/>
           </a:xfrm>
           <a:prstGeom prst="rect">
             <a:avLst/>
@@ -24045,7 +24512,7 @@
               </a:defRPr>
             </a:pPr>
             <a:r>
-              <a:t>LIFECYCLE CONTINUES</a:t>
+              <a:t>MANAGE EACH DEPLOYMENT</a:t>
             </a:r>
           </a:p>
         </p:txBody>
@@ -24102,7 +24569,7 @@
         <p:spPr>
           <a:xfrm>
             <a:off x="877824" y="4315968"/>
-            <a:ext cx="3291840" cy="310896"/>
+            <a:ext cx="5029200" cy="310896"/>
           </a:xfrm>
           <a:prstGeom prst="rect">
             <a:avLst/>
@@ -24133,7 +24600,7 @@
               </a:defRPr>
             </a:pPr>
             <a:r>
-              <a:t>resize-hardware</a:t>
+              <a:t>workspace per deployment</a:t>
             </a:r>
           </a:p>
         </p:txBody>
@@ -24146,7 +24613,7 @@
         </p:nvSpPr>
         <p:spPr>
           <a:xfrm>
-            <a:off x="4361688" y="4398264"/>
+            <a:off x="6190488" y="4398264"/>
             <a:ext cx="91440" cy="91440"/>
           </a:xfrm>
           <a:prstGeom prst="ellipse">
@@ -24189,8 +24656,8 @@
         </p:nvSpPr>
         <p:spPr>
           <a:xfrm>
-            <a:off x="4581144" y="4315968"/>
-            <a:ext cx="3291840" cy="310896"/>
+            <a:off x="6409944" y="4315968"/>
+            <a:ext cx="5029200" cy="310896"/>
           </a:xfrm>
           <a:prstGeom prst="rect">
             <a:avLst/>
@@ -24221,7 +24688,7 @@
               </a:defRPr>
             </a:pPr>
             <a:r>
-              <a:t>resize-disk + resize-volumes</a:t>
+              <a:t>state tracks provider resources</a:t>
             </a:r>
           </a:p>
         </p:txBody>
@@ -24234,7 +24701,7 @@
         </p:nvSpPr>
         <p:spPr>
           <a:xfrm>
-            <a:off x="8065008" y="4398264"/>
+            <a:off x="658368" y="5056631"/>
             <a:ext cx="91440" cy="91440"/>
           </a:xfrm>
           <a:prstGeom prst="ellipse">
@@ -24277,8 +24744,8 @@
         </p:nvSpPr>
         <p:spPr>
           <a:xfrm>
-            <a:off x="8284464" y="4315968"/>
-            <a:ext cx="3291840" cy="310896"/>
+            <a:off x="877824" y="4974336"/>
+            <a:ext cx="5029200" cy="310896"/>
           </a:xfrm>
           <a:prstGeom prst="rect">
             <a:avLst/>
@@ -24309,7 +24776,7 @@
               </a:defRPr>
             </a:pPr>
             <a:r>
-              <a:t>vmware-snapshot + enable-cbt</a:t>
+              <a:t>backup state outside the repo</a:t>
             </a:r>
           </a:p>
         </p:txBody>
@@ -24322,14 +24789,14 @@
         </p:nvSpPr>
         <p:spPr>
           <a:xfrm>
-            <a:off x="658368" y="5056631"/>
+            <a:off x="6190488" y="5056631"/>
             <a:ext cx="91440" cy="91440"/>
           </a:xfrm>
           <a:prstGeom prst="ellipse">
             <a:avLst/>
           </a:prstGeom>
           <a:solidFill>
-            <a:srgbClr val="087E82"/>
+            <a:srgbClr val="4D8766"/>
           </a:solidFill>
           <a:ln>
             <a:noFill/>
@@ -24365,8 +24832,8 @@
         </p:nvSpPr>
         <p:spPr>
           <a:xfrm>
-            <a:off x="877824" y="4974336"/>
-            <a:ext cx="3291840" cy="310896"/>
+            <a:off x="6409944" y="4974336"/>
+            <a:ext cx="5029200" cy="310896"/>
           </a:xfrm>
           <a:prstGeom prst="rect">
             <a:avLst/>
@@ -24397,190 +24864,14 @@
               </a:defRPr>
             </a:pPr>
             <a:r>
-              <a:t>guest-vmotion / power</a:t>
-            </a:r>
-          </a:p>
-        </p:txBody>
-      </p:sp>
-      <p:sp>
-        <p:nvSpPr>
-          <p:cNvPr id="31" name="Oval 30"/>
-          <p:cNvSpPr/>
-          <p:nvPr/>
-        </p:nvSpPr>
-        <p:spPr>
-          <a:xfrm>
-            <a:off x="4361688" y="5056631"/>
-            <a:ext cx="91440" cy="91440"/>
-          </a:xfrm>
-          <a:prstGeom prst="ellipse">
-            <a:avLst/>
-          </a:prstGeom>
-          <a:solidFill>
-            <a:srgbClr val="3978A8"/>
-          </a:solidFill>
-          <a:ln>
-            <a:noFill/>
-          </a:ln>
-        </p:spPr>
-        <p:style>
-          <a:lnRef idx="1">
-            <a:schemeClr val="accent1"/>
-          </a:lnRef>
-          <a:fillRef idx="3">
-            <a:schemeClr val="accent1"/>
-          </a:fillRef>
-          <a:effectRef idx="2">
-            <a:schemeClr val="accent1"/>
-          </a:effectRef>
-          <a:fontRef idx="minor">
-            <a:schemeClr val="lt1"/>
-          </a:fontRef>
-        </p:style>
-        <p:txBody>
-          <a:bodyPr rtlCol="0" anchor="ctr"/>
-          <a:lstStyle/>
-          <a:p>
-            <a:pPr algn="ctr"/>
-          </a:p>
-        </p:txBody>
-      </p:sp>
-      <p:sp>
-        <p:nvSpPr>
-          <p:cNvPr id="32" name="TextBox 31"/>
-          <p:cNvSpPr txBox="1"/>
-          <p:nvPr/>
-        </p:nvSpPr>
-        <p:spPr>
-          <a:xfrm>
-            <a:off x="4581144" y="4974336"/>
-            <a:ext cx="3291840" cy="310896"/>
-          </a:xfrm>
-          <a:prstGeom prst="rect">
-            <a:avLst/>
-          </a:prstGeom>
-          <a:noFill/>
-        </p:spPr>
-        <p:txBody>
-          <a:bodyPr wrap="square" lIns="18288" rIns="18288" tIns="18288" bIns="18288" anchor="t">
-            <a:spAutoFit/>
-          </a:bodyPr>
-          <a:lstStyle/>
-          <a:p>
-            <a:pPr algn="l">
-              <a:lnSpc>
-                <a:spcPct val="105000"/>
-              </a:lnSpc>
-              <a:spcBef>
-                <a:spcPts val="0"/>
-              </a:spcBef>
-              <a:spcAft>
-                <a:spcPts val="0"/>
-              </a:spcAft>
-              <a:defRPr sz="1250" b="1">
-                <a:solidFill>
-                  <a:srgbClr val="17242A"/>
-                </a:solidFill>
-                <a:latin typeface="DejaVu Sans Mono"/>
-              </a:defRPr>
-            </a:pPr>
-            <a:r>
-              <a:t>networks + ufw</a:t>
-            </a:r>
-          </a:p>
-        </p:txBody>
-      </p:sp>
-      <p:sp>
-        <p:nvSpPr>
-          <p:cNvPr id="33" name="Oval 32"/>
-          <p:cNvSpPr/>
-          <p:nvPr/>
-        </p:nvSpPr>
-        <p:spPr>
-          <a:xfrm>
-            <a:off x="8065008" y="5056631"/>
-            <a:ext cx="91440" cy="91440"/>
-          </a:xfrm>
-          <a:prstGeom prst="ellipse">
-            <a:avLst/>
-          </a:prstGeom>
-          <a:solidFill>
-            <a:srgbClr val="D95D43"/>
-          </a:solidFill>
-          <a:ln>
-            <a:noFill/>
-          </a:ln>
-        </p:spPr>
-        <p:style>
-          <a:lnRef idx="1">
-            <a:schemeClr val="accent1"/>
-          </a:lnRef>
-          <a:fillRef idx="3">
-            <a:schemeClr val="accent1"/>
-          </a:fillRef>
-          <a:effectRef idx="2">
-            <a:schemeClr val="accent1"/>
-          </a:effectRef>
-          <a:fontRef idx="minor">
-            <a:schemeClr val="lt1"/>
-          </a:fontRef>
-        </p:style>
-        <p:txBody>
-          <a:bodyPr rtlCol="0" anchor="ctr"/>
-          <a:lstStyle/>
-          <a:p>
-            <a:pPr algn="ctr"/>
-          </a:p>
-        </p:txBody>
-      </p:sp>
-      <p:sp>
-        <p:nvSpPr>
-          <p:cNvPr id="34" name="TextBox 33"/>
-          <p:cNvSpPr txBox="1"/>
-          <p:nvPr/>
-        </p:nvSpPr>
-        <p:spPr>
-          <a:xfrm>
-            <a:off x="8284464" y="4974336"/>
-            <a:ext cx="3291840" cy="310896"/>
-          </a:xfrm>
-          <a:prstGeom prst="rect">
-            <a:avLst/>
-          </a:prstGeom>
-          <a:noFill/>
-        </p:spPr>
-        <p:txBody>
-          <a:bodyPr wrap="square" lIns="18288" rIns="18288" tIns="18288" bIns="18288" anchor="t">
-            <a:spAutoFit/>
-          </a:bodyPr>
-          <a:lstStyle/>
-          <a:p>
-            <a:pPr algn="l">
-              <a:lnSpc>
-                <a:spcPct val="105000"/>
-              </a:lnSpc>
-              <a:spcBef>
-                <a:spcPts val="0"/>
-              </a:spcBef>
-              <a:spcAft>
-                <a:spcPts val="0"/>
-              </a:spcAft>
-              <a:defRPr sz="1250" b="1">
-                <a:solidFill>
-                  <a:srgbClr val="17242A"/>
-                </a:solidFill>
-                <a:latin typeface="DejaVu Sans Mono"/>
-              </a:defRPr>
-            </a:pPr>
-            <a:r>
-              <a:t>telegraf + do-release-upgrade</a:t>
-            </a:r>
-          </a:p>
-        </p:txBody>
-      </p:sp>
-      <p:sp>
-        <p:nvSpPr>
-          <p:cNvPr id="35" name="TextBox 34"/>
+              <a:t>edit launch settings, plan again</a:t>
+            </a:r>
+          </a:p>
+        </p:txBody>
+      </p:sp>
+      <p:sp>
+        <p:nvSpPr>
+          <p:cNvPr id="31" name="TextBox 30"/>
           <p:cNvSpPr txBox="1"/>
           <p:nvPr/>
         </p:nvSpPr>
@@ -24610,7 +24901,7 @@
               <a:spcAft>
                 <a:spcPts val="0"/>
               </a:spcAft>
-              <a:defRPr sz="1500" b="1">
+              <a:defRPr sz="1400" b="1">
                 <a:solidFill>
                   <a:srgbClr val="07595C"/>
                 </a:solidFill>
@@ -24618,14 +24909,14 @@
               </a:defRPr>
             </a:pPr>
             <a:r>
-              <a:t>Deployment is a handoff into operations, not a finish line.</a:t>
-            </a:r>
-          </a:p>
-        </p:txBody>
-      </p:sp>
-      <p:sp>
-        <p:nvSpPr>
-          <p:cNvPr id="36" name="TextBox 35"/>
+              <a:t>One catalog identity follows the selected image into Terraform state.</a:t>
+            </a:r>
+          </a:p>
+        </p:txBody>
+      </p:sp>
+      <p:sp>
+        <p:nvSpPr>
+          <p:cNvPr id="32" name="TextBox 31"/>
           <p:cNvSpPr txBox="1"/>
           <p:nvPr/>
         </p:nvSpPr>
@@ -24670,7 +24961,7 @@
       </p:sp>
       <p:sp>
         <p:nvSpPr>
-          <p:cNvPr id="37" name="TextBox 36"/>
+          <p:cNvPr id="33" name="TextBox 32"/>
           <p:cNvSpPr txBox="1"/>
           <p:nvPr/>
         </p:nvSpPr>
@@ -25039,4 +25330,324 @@
   </a:objectDefaults>
   <a:extraClrSchemeLst/>
 </a:theme>
+</file>
+
+<file path=ppt/theme/theme2.xml><?xml version="1.0" encoding="utf-8"?>
+<a:theme xmlns:a="http://schemas.openxmlformats.org/drawingml/2006/main" name="Office Theme">
+  <a:themeElements>
+    <a:clrScheme name="Office">
+      <a:dk1>
+        <a:sysClr val="windowText" lastClr="000000"/>
+      </a:dk1>
+      <a:lt1>
+        <a:sysClr val="window" lastClr="FFFFFF"/>
+      </a:lt1>
+      <a:dk2>
+        <a:srgbClr val="1F497D"/>
+      </a:dk2>
+      <a:lt2>
+        <a:srgbClr val="EEECE1"/>
+      </a:lt2>
+      <a:accent1>
+        <a:srgbClr val="4F81BD"/>
+      </a:accent1>
+      <a:accent2>
+        <a:srgbClr val="C0504D"/>
+      </a:accent2>
+      <a:accent3>
+        <a:srgbClr val="9BBB59"/>
+      </a:accent3>
+      <a:accent4>
+        <a:srgbClr val="8064A2"/>
+      </a:accent4>
+      <a:accent5>
+        <a:srgbClr val="4BACC6"/>
+      </a:accent5>
+      <a:accent6>
+        <a:srgbClr val="F79646"/>
+      </a:accent6>
+      <a:hlink>
+        <a:srgbClr val="0000FF"/>
+      </a:hlink>
+      <a:folHlink>
+        <a:srgbClr val="800080"/>
+      </a:folHlink>
+    </a:clrScheme>
+    <a:fontScheme name="Office">
+      <a:majorFont>
+        <a:latin typeface="Calibri"/>
+        <a:ea typeface=""/>
+        <a:cs typeface=""/>
+        <a:font script="Jpan" typeface="ＭＳ Ｐゴシック"/>
+        <a:font script="Hang" typeface="맑은 고딕"/>
+        <a:font script="Hans" typeface="宋体"/>
+        <a:font script="Hant" typeface="新細明體"/>
+        <a:font script="Arab" typeface="Times New Roman"/>
+        <a:font script="Hebr" typeface="Times New Roman"/>
+        <a:font script="Thai" typeface="Angsana New"/>
+        <a:font script="Ethi" typeface="Nyala"/>
+        <a:font script="Beng" typeface="Vrinda"/>
+        <a:font script="Gujr" typeface="Shruti"/>
+        <a:font script="Khmr" typeface="MoolBoran"/>
+        <a:font script="Knda" typeface="Tunga"/>
+        <a:font script="Guru" typeface="Raavi"/>
+        <a:font script="Cans" typeface="Euphemia"/>
+        <a:font script="Cher" typeface="Plantagenet Cherokee"/>
+        <a:font script="Yiii" typeface="Microsoft Yi Baiti"/>
+        <a:font script="Tibt" typeface="Microsoft Himalaya"/>
+        <a:font script="Thaa" typeface="MV Boli"/>
+        <a:font script="Deva" typeface="Mangal"/>
+        <a:font script="Telu" typeface="Gautami"/>
+        <a:font script="Taml" typeface="Latha"/>
+        <a:font script="Syrc" typeface="Estrangelo Edessa"/>
+        <a:font script="Orya" typeface="Kalinga"/>
+        <a:font script="Mlym" typeface="Kartika"/>
+        <a:font script="Laoo" typeface="DokChampa"/>
+        <a:font script="Sinh" typeface="Iskoola Pota"/>
+        <a:font script="Mong" typeface="Mongolian Baiti"/>
+        <a:font script="Viet" typeface="Times New Roman"/>
+        <a:font script="Uigh" typeface="Microsoft Uighur"/>
+        <a:font script="Geor" typeface="Sylfaen"/>
+      </a:majorFont>
+      <a:minorFont>
+        <a:latin typeface="Calibri"/>
+        <a:ea typeface=""/>
+        <a:cs typeface=""/>
+        <a:font script="Jpan" typeface="ＭＳ Ｐゴシック"/>
+        <a:font script="Hang" typeface="맑은 고딕"/>
+        <a:font script="Hans" typeface="宋体"/>
+        <a:font script="Hant" typeface="新細明體"/>
+        <a:font script="Arab" typeface="Arial"/>
+        <a:font script="Hebr" typeface="Arial"/>
+        <a:font script="Thai" typeface="Cordia New"/>
+        <a:font script="Ethi" typeface="Nyala"/>
+        <a:font script="Beng" typeface="Vrinda"/>
+        <a:font script="Gujr" typeface="Shruti"/>
+        <a:font script="Khmr" typeface="DaunPenh"/>
+        <a:font script="Knda" typeface="Tunga"/>
+        <a:font script="Guru" typeface="Raavi"/>
+        <a:font script="Cans" typeface="Euphemia"/>
+        <a:font script="Cher" typeface="Plantagenet Cherokee"/>
+        <a:font script="Yiii" typeface="Microsoft Yi Baiti"/>
+        <a:font script="Tibt" typeface="Microsoft Himalaya"/>
+        <a:font script="Thaa" typeface="MV Boli"/>
+        <a:font script="Deva" typeface="Mangal"/>
+        <a:font script="Telu" typeface="Gautami"/>
+        <a:font script="Taml" typeface="Latha"/>
+        <a:font script="Syrc" typeface="Estrangelo Edessa"/>
+        <a:font script="Orya" typeface="Kalinga"/>
+        <a:font script="Mlym" typeface="Kartika"/>
+        <a:font script="Laoo" typeface="DokChampa"/>
+        <a:font script="Sinh" typeface="Iskoola Pota"/>
+        <a:font script="Mong" typeface="Mongolian Baiti"/>
+        <a:font script="Viet" typeface="Arial"/>
+        <a:font script="Uigh" typeface="Microsoft Uighur"/>
+        <a:font script="Geor" typeface="Sylfaen"/>
+      </a:minorFont>
+    </a:fontScheme>
+    <a:fmtScheme name="Office">
+      <a:fillStyleLst>
+        <a:solidFill>
+          <a:schemeClr val="phClr"/>
+        </a:solidFill>
+        <a:gradFill rotWithShape="1">
+          <a:gsLst>
+            <a:gs pos="0">
+              <a:schemeClr val="phClr">
+                <a:tint val="50000"/>
+                <a:satMod val="300000"/>
+              </a:schemeClr>
+            </a:gs>
+            <a:gs pos="35000">
+              <a:schemeClr val="phClr">
+                <a:tint val="37000"/>
+                <a:satMod val="300000"/>
+              </a:schemeClr>
+            </a:gs>
+            <a:gs pos="100000">
+              <a:schemeClr val="phClr">
+                <a:tint val="15000"/>
+                <a:satMod val="350000"/>
+              </a:schemeClr>
+            </a:gs>
+          </a:gsLst>
+          <a:lin ang="16200000" scaled="1"/>
+        </a:gradFill>
+        <a:gradFill rotWithShape="1">
+          <a:gsLst>
+            <a:gs pos="0">
+              <a:schemeClr val="phClr">
+                <a:tint val="100000"/>
+                <a:shade val="100000"/>
+                <a:satMod val="130000"/>
+              </a:schemeClr>
+            </a:gs>
+            <a:gs pos="100000">
+              <a:schemeClr val="phClr">
+                <a:tint val="50000"/>
+                <a:shade val="100000"/>
+                <a:satMod val="350000"/>
+              </a:schemeClr>
+            </a:gs>
+          </a:gsLst>
+          <a:lin ang="16200000" scaled="0"/>
+        </a:gradFill>
+      </a:fillStyleLst>
+      <a:lnStyleLst>
+        <a:ln w="9525" cap="flat" cmpd="sng" algn="ctr">
+          <a:solidFill>
+            <a:schemeClr val="phClr">
+              <a:shade val="95000"/>
+              <a:satMod val="105000"/>
+            </a:schemeClr>
+          </a:solidFill>
+          <a:prstDash val="solid"/>
+        </a:ln>
+        <a:ln w="25400" cap="flat" cmpd="sng" algn="ctr">
+          <a:solidFill>
+            <a:schemeClr val="phClr"/>
+          </a:solidFill>
+          <a:prstDash val="solid"/>
+        </a:ln>
+        <a:ln w="38100" cap="flat" cmpd="sng" algn="ctr">
+          <a:solidFill>
+            <a:schemeClr val="phClr"/>
+          </a:solidFill>
+          <a:prstDash val="solid"/>
+        </a:ln>
+      </a:lnStyleLst>
+      <a:effectStyleLst>
+        <a:effectStyle>
+          <a:effectLst>
+            <a:outerShdw blurRad="40000" dist="20000" dir="5400000" rotWithShape="0">
+              <a:srgbClr val="000000">
+                <a:alpha val="38000"/>
+              </a:srgbClr>
+            </a:outerShdw>
+          </a:effectLst>
+        </a:effectStyle>
+        <a:effectStyle>
+          <a:effectLst>
+            <a:outerShdw blurRad="40000" dist="23000" dir="5400000" rotWithShape="0">
+              <a:srgbClr val="000000">
+                <a:alpha val="35000"/>
+              </a:srgbClr>
+            </a:outerShdw>
+          </a:effectLst>
+        </a:effectStyle>
+        <a:effectStyle>
+          <a:effectLst>
+            <a:outerShdw blurRad="40000" dist="23000" dir="5400000" rotWithShape="0">
+              <a:srgbClr val="000000">
+                <a:alpha val="35000"/>
+              </a:srgbClr>
+            </a:outerShdw>
+          </a:effectLst>
+          <a:scene3d>
+            <a:camera prst="orthographicFront">
+              <a:rot lat="0" lon="0" rev="0"/>
+            </a:camera>
+            <a:lightRig rig="threePt" dir="t">
+              <a:rot lat="0" lon="0" rev="1200000"/>
+            </a:lightRig>
+          </a:scene3d>
+          <a:sp3d>
+            <a:bevelT w="63500" h="25400"/>
+          </a:sp3d>
+        </a:effectStyle>
+      </a:effectStyleLst>
+      <a:bgFillStyleLst>
+        <a:solidFill>
+          <a:schemeClr val="phClr"/>
+        </a:solidFill>
+        <a:gradFill rotWithShape="1">
+          <a:gsLst>
+            <a:gs pos="0">
+              <a:schemeClr val="phClr">
+                <a:tint val="40000"/>
+                <a:satMod val="350000"/>
+              </a:schemeClr>
+            </a:gs>
+            <a:gs pos="40000">
+              <a:schemeClr val="phClr">
+                <a:tint val="45000"/>
+                <a:shade val="99000"/>
+                <a:satMod val="350000"/>
+              </a:schemeClr>
+            </a:gs>
+            <a:gs pos="100000">
+              <a:schemeClr val="phClr">
+                <a:shade val="20000"/>
+                <a:satMod val="255000"/>
+              </a:schemeClr>
+            </a:gs>
+          </a:gsLst>
+          <a:path path="circle">
+            <a:fillToRect l="50000" t="-80000" r="50000" b="180000"/>
+          </a:path>
+        </a:gradFill>
+        <a:gradFill rotWithShape="1">
+          <a:gsLst>
+            <a:gs pos="0">
+              <a:schemeClr val="phClr">
+                <a:tint val="80000"/>
+                <a:satMod val="300000"/>
+              </a:schemeClr>
+            </a:gs>
+            <a:gs pos="100000">
+              <a:schemeClr val="phClr">
+                <a:shade val="30000"/>
+                <a:satMod val="200000"/>
+              </a:schemeClr>
+            </a:gs>
+          </a:gsLst>
+          <a:path path="circle">
+            <a:fillToRect l="50000" t="50000" r="50000" b="50000"/>
+          </a:path>
+        </a:gradFill>
+      </a:bgFillStyleLst>
+    </a:fmtScheme>
+  </a:themeElements>
+  <a:objectDefaults>
+    <a:spDef>
+      <a:spPr/>
+      <a:bodyPr/>
+      <a:lstStyle/>
+      <a:style>
+        <a:lnRef idx="1">
+          <a:schemeClr val="accent1"/>
+        </a:lnRef>
+        <a:fillRef idx="3">
+          <a:schemeClr val="accent1"/>
+        </a:fillRef>
+        <a:effectRef idx="2">
+          <a:schemeClr val="accent1"/>
+        </a:effectRef>
+        <a:fontRef idx="minor">
+          <a:schemeClr val="lt1"/>
+        </a:fontRef>
+      </a:style>
+    </a:spDef>
+    <a:lnDef>
+      <a:spPr/>
+      <a:bodyPr/>
+      <a:lstStyle/>
+      <a:style>
+        <a:lnRef idx="2">
+          <a:schemeClr val="accent1"/>
+        </a:lnRef>
+        <a:fillRef idx="0">
+          <a:schemeClr val="accent1"/>
+        </a:fillRef>
+        <a:effectRef idx="1">
+          <a:schemeClr val="accent1"/>
+        </a:effectRef>
+        <a:fontRef idx="minor">
+          <a:schemeClr val="tx1"/>
+        </a:fontRef>
+      </a:style>
+    </a:lnDef>
+  </a:objectDefaults>
+  <a:extraClrSchemeLst/>
+</a:theme>
 </file>
--- a/doc/dib7-presentation.pptx
+++ b/doc/dib7-presentation.pptx
@@ -4608,7 +4608,7 @@
               </a:defRPr>
             </a:pPr>
             <a:r>
-              <a:t>diskimage-builder and Terraform, from seven Linux releases to four providers.</a:t>
+              <a:t>Image targets: AWS, Azure, Google Cloud, OpenStack, and vSphere.</a:t>
             </a:r>
           </a:p>
         </p:txBody>
@@ -5087,7 +5087,7 @@
               </a:defRPr>
             </a:pPr>
             <a:r>
-              <a:t>four providers</a:t>
+              <a:t>five image targets</a:t>
             </a:r>
           </a:p>
         </p:txBody>
@@ -10448,7 +10448,7 @@
               </a:defRPr>
             </a:pPr>
             <a:r>
-              <a:t>Seven-release image portfolio</a:t>
+              <a:t>Seven releases, five image targets</a:t>
             </a:r>
           </a:p>
         </p:txBody>
@@ -11930,7 +11930,7 @@
               </a:defRPr>
             </a:pPr>
             <a:r>
-              <a:t>QCOW2, then OVA where needed</a:t>
+              <a:t>QCOW2, then OVA or VHD where needed</a:t>
             </a:r>
           </a:p>
         </p:txBody>
@@ -14187,73 +14187,6 @@
       </p:sp>
       <p:sp>
         <p:nvSpPr>
-          <p:cNvPr id="34" name="TextBox 33"/>
-          <p:cNvSpPr txBox="1"/>
-          <p:nvPr/>
-        </p:nvSpPr>
-        <p:spPr>
-          <a:xfrm>
-            <a:off x="713232" y="4846320"/>
-            <a:ext cx="5257800" cy="749808"/>
-          </a:xfrm>
-          <a:prstGeom prst="rect">
-            <a:avLst/>
-          </a:prstGeom>
-          <a:noFill/>
-        </p:spPr>
-        <p:txBody>
-          <a:bodyPr wrap="square" lIns="18288" rIns="18288" tIns="18288" bIns="18288" anchor="t">
-            <a:spAutoFit/>
-          </a:bodyPr>
-          <a:lstStyle/>
-          <a:p>
-            <a:pPr algn="l">
-              <a:lnSpc>
-                <a:spcPct val="105000"/>
-              </a:lnSpc>
-              <a:spcBef>
-                <a:spcPts val="0"/>
-              </a:spcBef>
-              <a:spcAft>
-                <a:spcPts val="0"/>
-              </a:spcAft>
-              <a:defRPr sz="1500" b="1">
-                <a:solidFill>
-                  <a:srgbClr val="17242A"/>
-                </a:solidFill>
-                <a:latin typeface="Noto Sans"/>
-              </a:defRPr>
-            </a:pPr>
-            <a:r>
-              <a:t>One image build feeds the catalog.</a:t>
-            </a:r>
-          </a:p>
-          <a:p>
-            <a:pPr algn="l">
-              <a:lnSpc>
-                <a:spcPct val="105000"/>
-              </a:lnSpc>
-              <a:spcBef>
-                <a:spcPts val="0"/>
-              </a:spcBef>
-              <a:spcAft>
-                <a:spcPts val="0"/>
-              </a:spcAft>
-              <a:defRPr sz="1500" b="1">
-                <a:solidFill>
-                  <a:srgbClr val="17242A"/>
-                </a:solidFill>
-                <a:latin typeface="Noto Sans"/>
-              </a:defRPr>
-            </a:pPr>
-            <a:r>
-              <a:t>Terraform deploys from provider artifacts.</a:t>
-            </a:r>
-          </a:p>
-        </p:txBody>
-      </p:sp>
-      <p:sp>
-        <p:nvSpPr>
           <p:cNvPr id="35" name="TextBox 34"/>
           <p:cNvSpPr txBox="1"/>
           <p:nvPr/>
@@ -14338,6 +14271,188 @@
             </a:pPr>
             <a:r>
               <a:t>3</a:t>
+            </a:r>
+          </a:p>
+        </p:txBody>
+      </p:sp>
+      <p:cxnSp>
+        <p:nvCxnSpPr>
+          <p:cNvPr id="37" name="Connector 36"/>
+          <p:cNvCxnSpPr/>
+          <p:nvPr/>
+        </p:nvCxnSpPr>
+        <p:spPr>
+          <a:xfrm>
+            <a:off x="4800600" y="3666744"/>
+            <a:ext cx="0" cy="941832"/>
+          </a:xfrm>
+          <a:prstGeom prst="line">
+            <a:avLst/>
+          </a:prstGeom>
+          <a:ln w="25400">
+            <a:solidFill>
+              <a:srgbClr val="008189"/>
+            </a:solidFill>
+          </a:ln>
+        </p:spPr>
+        <p:style>
+          <a:lnRef idx="2">
+            <a:schemeClr val="accent1"/>
+          </a:lnRef>
+          <a:fillRef idx="0">
+            <a:schemeClr val="accent1"/>
+          </a:fillRef>
+          <a:effectRef idx="1">
+            <a:schemeClr val="accent1"/>
+          </a:effectRef>
+          <a:fontRef idx="minor">
+            <a:schemeClr val="tx1"/>
+          </a:fontRef>
+        </p:style>
+      </p:cxnSp>
+      <p:sp>
+        <p:nvSpPr>
+          <p:cNvPr id="38" name="Rounded Rectangle 37"/>
+          <p:cNvSpPr/>
+          <p:nvPr/>
+        </p:nvSpPr>
+        <p:spPr>
+          <a:xfrm>
+            <a:off x="713232" y="4645152"/>
+            <a:ext cx="5166360" cy="1078992"/>
+          </a:xfrm>
+          <a:prstGeom prst="roundRect">
+            <a:avLst/>
+          </a:prstGeom>
+          <a:solidFill>
+            <a:srgbClr val="E6F3F2"/>
+          </a:solidFill>
+          <a:ln w="12700">
+            <a:solidFill>
+              <a:srgbClr val="A6C3C1"/>
+            </a:solidFill>
+          </a:ln>
+        </p:spPr>
+        <p:style>
+          <a:lnRef idx="1">
+            <a:schemeClr val="accent1"/>
+          </a:lnRef>
+          <a:fillRef idx="3">
+            <a:schemeClr val="accent1"/>
+          </a:fillRef>
+          <a:effectRef idx="2">
+            <a:schemeClr val="accent1"/>
+          </a:effectRef>
+          <a:fontRef idx="minor">
+            <a:schemeClr val="lt1"/>
+          </a:fontRef>
+        </p:style>
+        <p:txBody>
+          <a:bodyPr rtlCol="0" anchor="ctr"/>
+          <a:lstStyle/>
+          <a:p>
+            <a:pPr algn="ctr"/>
+          </a:p>
+        </p:txBody>
+      </p:sp>
+      <p:sp>
+        <p:nvSpPr>
+          <p:cNvPr id="39" name="TextBox 38"/>
+          <p:cNvSpPr txBox="1"/>
+          <p:nvPr/>
+        </p:nvSpPr>
+        <p:spPr>
+          <a:xfrm>
+            <a:off x="932688" y="4791456"/>
+            <a:ext cx="1051560" cy="283464"/>
+          </a:xfrm>
+          <a:prstGeom prst="rect">
+            <a:avLst/>
+          </a:prstGeom>
+          <a:noFill/>
+        </p:spPr>
+        <p:txBody>
+          <a:bodyPr wrap="none" lIns="0" rIns="0" tIns="0" bIns="0">
+            <a:spAutoFit/>
+          </a:bodyPr>
+          <a:lstStyle/>
+          <a:p>
+            <a:r>
+              <a:rPr sz="1300" b="1">
+                <a:solidFill>
+                  <a:srgbClr val="008189"/>
+                </a:solidFill>
+                <a:latin typeface="Aptos"/>
+              </a:rPr>
+              <a:t>AZURE</a:t>
+            </a:r>
+          </a:p>
+        </p:txBody>
+      </p:sp>
+      <p:sp>
+        <p:nvSpPr>
+          <p:cNvPr id="40" name="TextBox 39"/>
+          <p:cNvSpPr txBox="1"/>
+          <p:nvPr/>
+        </p:nvSpPr>
+        <p:spPr>
+          <a:xfrm>
+            <a:off x="1938528" y="4773168"/>
+            <a:ext cx="3712463" cy="310896"/>
+          </a:xfrm>
+          <a:prstGeom prst="rect">
+            <a:avLst/>
+          </a:prstGeom>
+          <a:noFill/>
+        </p:spPr>
+        <p:txBody>
+          <a:bodyPr wrap="none" lIns="0" rIns="0" tIns="0" bIns="0">
+            <a:spAutoFit/>
+          </a:bodyPr>
+          <a:lstStyle/>
+          <a:p>
+            <a:r>
+              <a:rPr sz="1400" b="1">
+                <a:solidFill>
+                  <a:srgbClr val="192A31"/>
+                </a:solidFill>
+                <a:latin typeface="Aptos"/>
+              </a:rPr>
+              <a:t>QCOW2 → fixed VHD → Blob Storage</a:t>
+            </a:r>
+          </a:p>
+        </p:txBody>
+      </p:sp>
+      <p:sp>
+        <p:nvSpPr>
+          <p:cNvPr id="41" name="TextBox 40"/>
+          <p:cNvSpPr txBox="1"/>
+          <p:nvPr/>
+        </p:nvSpPr>
+        <p:spPr>
+          <a:xfrm>
+            <a:off x="932688" y="5212080"/>
+            <a:ext cx="4663440" cy="310896"/>
+          </a:xfrm>
+          <a:prstGeom prst="rect">
+            <a:avLst/>
+          </a:prstGeom>
+          <a:noFill/>
+        </p:spPr>
+        <p:txBody>
+          <a:bodyPr wrap="none" lIns="0" rIns="0" tIns="0" bIns="0">
+            <a:spAutoFit/>
+          </a:bodyPr>
+          <a:lstStyle/>
+          <a:p>
+            <a:r>
+              <a:rPr sz="1400" b="0">
+                <a:solidFill>
+                  <a:srgbClr val="556971"/>
+                </a:solidFill>
+                <a:latin typeface="Aptos"/>
+              </a:rPr>
+              <a:t>Managed image + catalog entry</a:t>
             </a:r>
           </a:p>
         </p:txBody>
@@ -18331,7 +18446,7 @@
               </a:defRPr>
             </a:pPr>
             <a:r>
-              <a:t>4 targets</a:t>
+              <a:t>5 targets</a:t>
             </a:r>
           </a:p>
         </p:txBody>
